--- a/阶段2-卫星多智能体防御/presentations/卫星多智能体安全调研汇报.pptx
+++ b/阶段2-卫星多智能体防御/presentations/卫星多智能体安全调研汇报.pptx
@@ -3267,7 +3267,7 @@
                 </a:solidFill>
                 <a:latin typeface="STHeiti"/>
               </a:rPr>
-              <a:t>攻击：Crescendo · Beyond Single-Model Injection · Adaptive Adversaries</a:t>
+              <a:t>攻击侧：多轮攻击范式 · 多智能体威胁模型 · 自适应评测基准</a:t>
             </a:r>
           </a:p>
           <a:p>
@@ -3283,7 +3283,7 @@
                 </a:solidFill>
                 <a:latin typeface="STHeiti"/>
               </a:rPr>
-              <a:t>防御：Trust Propagation · CaMeL · Design Patterns · Speculative Safety Honeypot · VIGIL</a:t>
+              <a:t>防御侧：独立授权 · 设计层防御 · 架构模式 · 推测—验证 · 工具流验证</a:t>
             </a:r>
           </a:p>
         </p:txBody>
@@ -3369,7 +3369,7 @@
                 </a:solidFill>
                 <a:latin typeface="STHeiti"/>
               </a:rPr>
-              <a:t>2. Beyond Single-Model Injection · 动机与难点</a:t>
+              <a:t>第 2 篇 · 动机与难点</a:t>
             </a:r>
           </a:p>
         </p:txBody>
@@ -3816,7 +3816,7 @@
                 </a:solidFill>
                 <a:latin typeface="STHeiti"/>
               </a:rPr>
-              <a:t>2. Beyond Single-Model Injection · 模型</a:t>
+              <a:t>第 2 篇 · 模型</a:t>
             </a:r>
           </a:p>
         </p:txBody>
@@ -4106,7 +4106,7 @@
                 </a:solidFill>
                 <a:latin typeface="STHeiti"/>
               </a:rPr>
-              <a:t>2. Beyond Single-Model Injection · 实验结果</a:t>
+              <a:t>第 2 篇 · 实验结果</a:t>
             </a:r>
           </a:p>
         </p:txBody>
@@ -4998,7 +4998,7 @@
                 </a:solidFill>
                 <a:latin typeface="STHeiti"/>
               </a:rPr>
-              <a:t>3. Adaptive Adversaries</a:t>
+              <a:t>第 3 篇</a:t>
             </a:r>
           </a:p>
         </p:txBody>
@@ -5332,7 +5332,7 @@
                 </a:solidFill>
                 <a:latin typeface="STHeiti"/>
               </a:rPr>
-              <a:t>3. Adaptive Adversaries · 动机与难点</a:t>
+              <a:t>第 3 篇 · 动机与难点</a:t>
             </a:r>
           </a:p>
         </p:txBody>
@@ -5779,7 +5779,7 @@
                 </a:solidFill>
                 <a:latin typeface="STHeiti"/>
               </a:rPr>
-              <a:t>3. Adaptive Adversaries · 模型</a:t>
+              <a:t>第 3 篇 · 模型</a:t>
             </a:r>
           </a:p>
         </p:txBody>
@@ -6128,7 +6128,7 @@
                 </a:solidFill>
                 <a:latin typeface="STHeiti"/>
               </a:rPr>
-              <a:t>3. Adaptive Adversaries · 实验结果</a:t>
+              <a:t>第 3 篇 · 实验结果</a:t>
             </a:r>
           </a:p>
         </p:txBody>
@@ -6792,7 +6792,7 @@
                 </a:solidFill>
                 <a:latin typeface="STHeiti"/>
               </a:rPr>
-              <a:t>4. Trust Propagation</a:t>
+              <a:t>第 4 篇</a:t>
             </a:r>
           </a:p>
         </p:txBody>
@@ -7126,7 +7126,7 @@
                 </a:solidFill>
                 <a:latin typeface="STHeiti"/>
               </a:rPr>
-              <a:t>4. Trust Propagation · 动机与难点</a:t>
+              <a:t>第 4 篇 · 动机与难点</a:t>
             </a:r>
           </a:p>
         </p:txBody>
@@ -7548,7 +7548,7 @@
                 </a:solidFill>
                 <a:latin typeface="STHeiti"/>
               </a:rPr>
-              <a:t>4. Trust Propagation · 模型</a:t>
+              <a:t>第 4 篇 · 模型</a:t>
             </a:r>
           </a:p>
         </p:txBody>
@@ -8686,7 +8686,7 @@
                 </a:solidFill>
                 <a:latin typeface="STHeiti"/>
               </a:rPr>
-              <a:t>4. Trust Propagation · 实验结果</a:t>
+              <a:t>第 4 篇 · 实验结果</a:t>
             </a:r>
           </a:p>
         </p:txBody>
@@ -9664,7 +9664,7 @@
                 </a:solidFill>
                 <a:latin typeface="STHeiti"/>
               </a:rPr>
-              <a:t>5. CaMeL</a:t>
+              <a:t>第 5 篇</a:t>
             </a:r>
           </a:p>
         </p:txBody>
@@ -9997,7 +9997,7 @@
                 </a:solidFill>
                 <a:latin typeface="STHeiti"/>
               </a:rPr>
-              <a:t>5. CaMeL · 动机与难点</a:t>
+              <a:t>第 5 篇 · 动机与难点</a:t>
             </a:r>
           </a:p>
         </p:txBody>
@@ -10419,7 +10419,7 @@
                 </a:solidFill>
                 <a:latin typeface="STHeiti"/>
               </a:rPr>
-              <a:t>5. CaMeL · 模型</a:t>
+              <a:t>第 5 篇 · 模型</a:t>
             </a:r>
           </a:p>
         </p:txBody>
@@ -10768,7 +10768,7 @@
                 </a:solidFill>
                 <a:latin typeface="STHeiti"/>
               </a:rPr>
-              <a:t>5. CaMeL · 实验结果</a:t>
+              <a:t>第 5 篇 · 实验结果</a:t>
             </a:r>
           </a:p>
         </p:txBody>
@@ -11432,7 +11432,7 @@
                 </a:solidFill>
                 <a:latin typeface="STHeiti"/>
               </a:rPr>
-              <a:t>6. Design Patterns</a:t>
+              <a:t>第 6 篇</a:t>
             </a:r>
           </a:p>
         </p:txBody>
@@ -11766,7 +11766,7 @@
                 </a:solidFill>
                 <a:latin typeface="STHeiti"/>
               </a:rPr>
-              <a:t>6. Design Patterns · 动机与难点</a:t>
+              <a:t>第 6 篇 · 动机与难点</a:t>
             </a:r>
           </a:p>
         </p:txBody>
@@ -12188,7 +12188,7 @@
                 </a:solidFill>
                 <a:latin typeface="STHeiti"/>
               </a:rPr>
-              <a:t>6. Design Patterns · 模型</a:t>
+              <a:t>第 6 篇 · 模型</a:t>
             </a:r>
           </a:p>
         </p:txBody>
@@ -12587,7 +12587,7 @@
                 </a:solidFill>
                 <a:latin typeface="STHeiti"/>
               </a:rPr>
-              <a:t>6. Design Patterns · 实验结果</a:t>
+              <a:t>第 6 篇 · 实验结果</a:t>
             </a:r>
           </a:p>
         </p:txBody>
@@ -13454,7 +13454,7 @@
                 </a:solidFill>
                 <a:latin typeface="STHeiti"/>
               </a:rPr>
-              <a:t>7. Speculative Safety Honeypot</a:t>
+              <a:t>第 7 篇</a:t>
             </a:r>
           </a:p>
         </p:txBody>
@@ -14430,7 +14430,7 @@
                 </a:solidFill>
                 <a:latin typeface="STHeiti"/>
               </a:rPr>
-              <a:t>7. Speculative Safety Honeypot · 动机与难点</a:t>
+              <a:t>第 7 篇 · 动机与难点</a:t>
             </a:r>
           </a:p>
         </p:txBody>
@@ -14852,7 +14852,7 @@
                 </a:solidFill>
                 <a:latin typeface="STHeiti"/>
               </a:rPr>
-              <a:t>7. Speculative Safety Honeypot · 模型</a:t>
+              <a:t>第 7 篇 · 模型</a:t>
             </a:r>
           </a:p>
         </p:txBody>
@@ -15226,7 +15226,7 @@
                 </a:solidFill>
                 <a:latin typeface="STHeiti"/>
               </a:rPr>
-              <a:t>7. Speculative Safety Honeypot · 实验结果</a:t>
+              <a:t>第 7 篇 · 实验结果</a:t>
             </a:r>
           </a:p>
         </p:txBody>
@@ -15961,7 +15961,7 @@
                 </a:solidFill>
                 <a:latin typeface="STHeiti"/>
               </a:rPr>
-              <a:t>8. VIGIL</a:t>
+              <a:t>第 8 篇</a:t>
             </a:r>
           </a:p>
         </p:txBody>
@@ -16295,7 +16295,7 @@
                 </a:solidFill>
                 <a:latin typeface="STHeiti"/>
               </a:rPr>
-              <a:t>8. VIGIL · 动机与难点</a:t>
+              <a:t>第 8 篇 · 动机与难点</a:t>
             </a:r>
           </a:p>
         </p:txBody>
@@ -16742,7 +16742,7 @@
                 </a:solidFill>
                 <a:latin typeface="STHeiti"/>
               </a:rPr>
-              <a:t>8. VIGIL · 模型</a:t>
+              <a:t>第 8 篇 · 模型</a:t>
             </a:r>
           </a:p>
         </p:txBody>
@@ -17116,7 +17116,7 @@
                 </a:solidFill>
                 <a:latin typeface="STHeiti"/>
               </a:rPr>
-              <a:t>8. VIGIL · 实验结果</a:t>
+              <a:t>第 8 篇 · 实验结果</a:t>
             </a:r>
           </a:p>
         </p:txBody>
@@ -19528,8 +19528,8 @@
           <p:nvPr/>
         </p:nvGraphicFramePr>
         <p:xfrm>
-          <a:off x="566928" y="1792224"/>
-          <a:ext cx="11057837" cy="2962656"/>
+          <a:off x="566928" y="1773936"/>
+          <a:ext cx="11057837" cy="3823331"/>
         </p:xfrm>
         <a:graphic>
           <a:graphicData uri="http://schemas.openxmlformats.org/drawingml/2006/table">
@@ -19538,10 +19538,10 @@
                 <a:tableStyleId>{5C22544A-7EE6-4342-B048-85BDC9FD1C3A}</a:tableStyleId>
               </a:tblPr>
               <a:tblGrid>
-                <a:gridCol w="415317"/>
-                <a:gridCol w="4542539"/>
-                <a:gridCol w="3244671"/>
-                <a:gridCol w="2855310"/>
+                <a:gridCol w="340990"/>
+                <a:gridCol w="5601988"/>
+                <a:gridCol w="2679212"/>
+                <a:gridCol w="2435647"/>
               </a:tblGrid>
               <a:tr h="329184">
                 <a:tc>
@@ -19550,7 +19550,7 @@
                     <a:lstStyle/>
                     <a:p>
                       <a:r>
-                        <a:rPr sz="1200" b="1">
+                        <a:rPr sz="1100" b="1">
                           <a:solidFill>
                             <a:srgbClr val="FFFFFF"/>
                           </a:solidFill>
@@ -19572,13 +19572,13 @@
                     <a:lstStyle/>
                     <a:p>
                       <a:r>
-                        <a:rPr sz="1200" b="1">
+                        <a:rPr sz="1100" b="1">
                           <a:solidFill>
                             <a:srgbClr val="FFFFFF"/>
                           </a:solidFill>
                           <a:latin typeface="STHeiti"/>
                         </a:rPr>
-                        <a:t>论文（原标题简称）</a:t>
+                        <a:t>论文（原标题）</a:t>
                       </a:r>
                     </a:p>
                   </a:txBody>
@@ -19594,7 +19594,7 @@
                     <a:lstStyle/>
                     <a:p>
                       <a:r>
-                        <a:rPr sz="1200" b="1">
+                        <a:rPr sz="1100" b="1">
                           <a:solidFill>
                             <a:srgbClr val="FFFFFF"/>
                           </a:solidFill>
@@ -19616,7 +19616,7 @@
                     <a:lstStyle/>
                     <a:p>
                       <a:r>
-                        <a:rPr sz="1200" b="1">
+                        <a:rPr sz="1100" b="1">
                           <a:solidFill>
                             <a:srgbClr val="FFFFFF"/>
                           </a:solidFill>
@@ -19633,14 +19633,14 @@
                   </a:tcPr>
                 </a:tc>
               </a:tr>
-              <a:tr h="329184">
+              <a:tr h="501319">
                 <a:tc>
                   <a:txBody>
                     <a:bodyPr/>
                     <a:lstStyle/>
                     <a:p>
                       <a:r>
-                        <a:rPr sz="1250" b="0">
+                        <a:rPr sz="1050" b="0">
                           <a:solidFill>
                             <a:srgbClr val="22272E"/>
                           </a:solidFill>
@@ -19662,13 +19662,13 @@
                     <a:lstStyle/>
                     <a:p>
                       <a:r>
-                        <a:rPr sz="1250" b="0">
+                        <a:rPr sz="1050" b="0">
                           <a:solidFill>
                             <a:srgbClr val="22272E"/>
                           </a:solidFill>
                           <a:latin typeface="STHeiti"/>
                         </a:rPr>
-                        <a:t>Crescendo</a:t>
+                        <a:t>Great, Now Write an Article About That: The Crescendo Multi-Turn LLM Jailbreak Attack</a:t>
                       </a:r>
                     </a:p>
                   </a:txBody>
@@ -19684,7 +19684,7 @@
                     <a:lstStyle/>
                     <a:p>
                       <a:r>
-                        <a:rPr sz="1250" b="0">
+                        <a:rPr sz="1050" b="0">
                           <a:solidFill>
                             <a:srgbClr val="22272E"/>
                           </a:solidFill>
@@ -19706,7 +19706,7 @@
                     <a:lstStyle/>
                     <a:p>
                       <a:r>
-                        <a:rPr sz="1250" b="0">
+                        <a:rPr sz="1050" b="0">
                           <a:solidFill>
                             <a:srgbClr val="22272E"/>
                           </a:solidFill>
@@ -19723,14 +19723,14 @@
                   </a:tcPr>
                 </a:tc>
               </a:tr>
-              <a:tr h="329184">
+              <a:tr h="501319">
                 <a:tc>
                   <a:txBody>
                     <a:bodyPr/>
                     <a:lstStyle/>
                     <a:p>
                       <a:r>
-                        <a:rPr sz="1250" b="0">
+                        <a:rPr sz="1050" b="0">
                           <a:solidFill>
                             <a:srgbClr val="22272E"/>
                           </a:solidFill>
@@ -19752,13 +19752,13 @@
                     <a:lstStyle/>
                     <a:p>
                       <a:r>
-                        <a:rPr sz="1250" b="0">
+                        <a:rPr sz="1050" b="0">
                           <a:solidFill>
                             <a:srgbClr val="22272E"/>
                           </a:solidFill>
                           <a:latin typeface="STHeiti"/>
                         </a:rPr>
-                        <a:t>Beyond Single-Model Injection</a:t>
+                        <a:t>Beyond Single-Model Injection: A Threat Model and Defense Architecture for Prompt Injection in Multi-Agent Systems</a:t>
                       </a:r>
                     </a:p>
                   </a:txBody>
@@ -19774,7 +19774,7 @@
                     <a:lstStyle/>
                     <a:p>
                       <a:r>
-                        <a:rPr sz="1250" b="0">
+                        <a:rPr sz="1050" b="0">
                           <a:solidFill>
                             <a:srgbClr val="22272E"/>
                           </a:solidFill>
@@ -19796,7 +19796,7 @@
                     <a:lstStyle/>
                     <a:p>
                       <a:r>
-                        <a:rPr sz="1250" b="0">
+                        <a:rPr sz="1050" b="0">
                           <a:solidFill>
                             <a:srgbClr val="22272E"/>
                           </a:solidFill>
@@ -19813,14 +19813,14 @@
                   </a:tcPr>
                 </a:tc>
               </a:tr>
-              <a:tr h="329184">
+              <a:tr h="501319">
                 <a:tc>
                   <a:txBody>
                     <a:bodyPr/>
                     <a:lstStyle/>
                     <a:p>
                       <a:r>
-                        <a:rPr sz="1250" b="0">
+                        <a:rPr sz="1050" b="0">
                           <a:solidFill>
                             <a:srgbClr val="22272E"/>
                           </a:solidFill>
@@ -19842,13 +19842,13 @@
                     <a:lstStyle/>
                     <a:p>
                       <a:r>
-                        <a:rPr sz="1250" b="0">
+                        <a:rPr sz="1050" b="0">
                           <a:solidFill>
                             <a:srgbClr val="22272E"/>
                           </a:solidFill>
                           <a:latin typeface="STHeiti"/>
                         </a:rPr>
-                        <a:t>Adaptive Adversaries</a:t>
+                        <a:t>Adaptive Adversaries: A Multi-Turn, Multi-LLM Benchmark for LLM Agent Security</a:t>
                       </a:r>
                     </a:p>
                   </a:txBody>
@@ -19864,7 +19864,7 @@
                     <a:lstStyle/>
                     <a:p>
                       <a:r>
-                        <a:rPr sz="1250" b="0">
+                        <a:rPr sz="1050" b="0">
                           <a:solidFill>
                             <a:srgbClr val="22272E"/>
                           </a:solidFill>
@@ -19886,7 +19886,7 @@
                     <a:lstStyle/>
                     <a:p>
                       <a:r>
-                        <a:rPr sz="1250" b="0">
+                        <a:rPr sz="1050" b="0">
                           <a:solidFill>
                             <a:srgbClr val="22272E"/>
                           </a:solidFill>
@@ -19910,7 +19910,7 @@
                     <a:lstStyle/>
                     <a:p>
                       <a:r>
-                        <a:rPr sz="1250" b="0">
+                        <a:rPr sz="1050" b="0">
                           <a:solidFill>
                             <a:srgbClr val="22272E"/>
                           </a:solidFill>
@@ -19932,13 +19932,13 @@
                     <a:lstStyle/>
                     <a:p>
                       <a:r>
-                        <a:rPr sz="1250" b="0">
+                        <a:rPr sz="1050" b="0">
                           <a:solidFill>
                             <a:srgbClr val="22272E"/>
                           </a:solidFill>
                           <a:latin typeface="STHeiti"/>
                         </a:rPr>
-                        <a:t>Trust Propagation</a:t>
+                        <a:t>Trust Propagation and Structural Containment in Multi-Agent LLM Pipelines</a:t>
                       </a:r>
                     </a:p>
                   </a:txBody>
@@ -19954,7 +19954,7 @@
                     <a:lstStyle/>
                     <a:p>
                       <a:r>
-                        <a:rPr sz="1250" b="0">
+                        <a:rPr sz="1050" b="0">
                           <a:solidFill>
                             <a:srgbClr val="22272E"/>
                           </a:solidFill>
@@ -19976,7 +19976,7 @@
                     <a:lstStyle/>
                     <a:p>
                       <a:r>
-                        <a:rPr sz="1250" b="0">
+                        <a:rPr sz="1050" b="0">
                           <a:solidFill>
                             <a:srgbClr val="22272E"/>
                           </a:solidFill>
@@ -20000,7 +20000,7 @@
                     <a:lstStyle/>
                     <a:p>
                       <a:r>
-                        <a:rPr sz="1250" b="0">
+                        <a:rPr sz="1050" b="0">
                           <a:solidFill>
                             <a:srgbClr val="22272E"/>
                           </a:solidFill>
@@ -20022,13 +20022,13 @@
                     <a:lstStyle/>
                     <a:p>
                       <a:r>
-                        <a:rPr sz="1250" b="0">
+                        <a:rPr sz="1050" b="0">
                           <a:solidFill>
                             <a:srgbClr val="22272E"/>
                           </a:solidFill>
                           <a:latin typeface="STHeiti"/>
                         </a:rPr>
-                        <a:t>CaMeL</a:t>
+                        <a:t>Defeating Prompt Injections by Design</a:t>
                       </a:r>
                     </a:p>
                   </a:txBody>
@@ -20044,7 +20044,7 @@
                     <a:lstStyle/>
                     <a:p>
                       <a:r>
-                        <a:rPr sz="1250" b="0">
+                        <a:rPr sz="1050" b="0">
                           <a:solidFill>
                             <a:srgbClr val="22272E"/>
                           </a:solidFill>
@@ -20066,7 +20066,7 @@
                     <a:lstStyle/>
                     <a:p>
                       <a:r>
-                        <a:rPr sz="1250" b="0">
+                        <a:rPr sz="1050" b="0">
                           <a:solidFill>
                             <a:srgbClr val="22272E"/>
                           </a:solidFill>
@@ -20090,7 +20090,7 @@
                     <a:lstStyle/>
                     <a:p>
                       <a:r>
-                        <a:rPr sz="1250" b="0">
+                        <a:rPr sz="1050" b="0">
                           <a:solidFill>
                             <a:srgbClr val="22272E"/>
                           </a:solidFill>
@@ -20112,13 +20112,13 @@
                     <a:lstStyle/>
                     <a:p>
                       <a:r>
-                        <a:rPr sz="1250" b="0">
+                        <a:rPr sz="1050" b="0">
                           <a:solidFill>
                             <a:srgbClr val="22272E"/>
                           </a:solidFill>
                           <a:latin typeface="STHeiti"/>
                         </a:rPr>
-                        <a:t>Design Patterns</a:t>
+                        <a:t>Design Patterns for Securing LLM Agents against Prompt Injections</a:t>
                       </a:r>
                     </a:p>
                   </a:txBody>
@@ -20134,7 +20134,7 @@
                     <a:lstStyle/>
                     <a:p>
                       <a:r>
-                        <a:rPr sz="1250" b="0">
+                        <a:rPr sz="1050" b="0">
                           <a:solidFill>
                             <a:srgbClr val="22272E"/>
                           </a:solidFill>
@@ -20156,7 +20156,7 @@
                     <a:lstStyle/>
                     <a:p>
                       <a:r>
-                        <a:rPr sz="1250" b="0">
+                        <a:rPr sz="1050" b="0">
                           <a:solidFill>
                             <a:srgbClr val="22272E"/>
                           </a:solidFill>
@@ -20173,14 +20173,14 @@
                   </a:tcPr>
                 </a:tc>
               </a:tr>
-              <a:tr h="329184">
+              <a:tr h="501319">
                 <a:tc>
                   <a:txBody>
                     <a:bodyPr/>
                     <a:lstStyle/>
                     <a:p>
                       <a:r>
-                        <a:rPr sz="1250" b="0">
+                        <a:rPr sz="1050" b="0">
                           <a:solidFill>
                             <a:srgbClr val="22272E"/>
                           </a:solidFill>
@@ -20202,13 +20202,13 @@
                     <a:lstStyle/>
                     <a:p>
                       <a:r>
-                        <a:rPr sz="1250" b="0">
+                        <a:rPr sz="1050" b="0">
                           <a:solidFill>
                             <a:srgbClr val="22272E"/>
                           </a:solidFill>
                           <a:latin typeface="STHeiti"/>
                         </a:rPr>
-                        <a:t>Speculative Safety Honeypot</a:t>
+                        <a:t>Speculative Safety Honeypot: Toward Proactive Defense Against Multi-turn Agent Attacks</a:t>
                       </a:r>
                     </a:p>
                   </a:txBody>
@@ -20224,7 +20224,7 @@
                     <a:lstStyle/>
                     <a:p>
                       <a:r>
-                        <a:rPr sz="1250" b="0">
+                        <a:rPr sz="1050" b="0">
                           <a:solidFill>
                             <a:srgbClr val="22272E"/>
                           </a:solidFill>
@@ -20246,7 +20246,7 @@
                     <a:lstStyle/>
                     <a:p>
                       <a:r>
-                        <a:rPr sz="1250" b="0">
+                        <a:rPr sz="1050" b="0">
                           <a:solidFill>
                             <a:srgbClr val="22272E"/>
                           </a:solidFill>
@@ -20263,14 +20263,14 @@
                   </a:tcPr>
                 </a:tc>
               </a:tr>
-              <a:tr h="329184">
+              <a:tr h="501319">
                 <a:tc>
                   <a:txBody>
                     <a:bodyPr/>
                     <a:lstStyle/>
                     <a:p>
                       <a:r>
-                        <a:rPr sz="1250" b="0">
+                        <a:rPr sz="1050" b="0">
                           <a:solidFill>
                             <a:srgbClr val="22272E"/>
                           </a:solidFill>
@@ -20292,13 +20292,13 @@
                     <a:lstStyle/>
                     <a:p>
                       <a:r>
-                        <a:rPr sz="1250" b="0">
+                        <a:rPr sz="1050" b="0">
                           <a:solidFill>
                             <a:srgbClr val="22272E"/>
                           </a:solidFill>
                           <a:latin typeface="STHeiti"/>
                         </a:rPr>
-                        <a:t>VIGIL</a:t>
+                        <a:t>VIGIL: Defending LLM Agents Against Tool Stream Injection via Verify-Before-Commit</a:t>
                       </a:r>
                     </a:p>
                   </a:txBody>
@@ -20314,7 +20314,7 @@
                     <a:lstStyle/>
                     <a:p>
                       <a:r>
-                        <a:rPr sz="1250" b="0">
+                        <a:rPr sz="1050" b="0">
                           <a:solidFill>
                             <a:srgbClr val="22272E"/>
                           </a:solidFill>
@@ -20336,7 +20336,7 @@
                     <a:lstStyle/>
                     <a:p>
                       <a:r>
-                        <a:rPr sz="1250" b="0">
+                        <a:rPr sz="1050" b="0">
                           <a:solidFill>
                             <a:srgbClr val="22272E"/>
                           </a:solidFill>
@@ -20438,7 +20438,7 @@
                 </a:solidFill>
                 <a:latin typeface="STHeiti"/>
               </a:rPr>
-              <a:t>1. Crescendo</a:t>
+              <a:t>第 1 篇</a:t>
             </a:r>
           </a:p>
         </p:txBody>
@@ -20772,7 +20772,7 @@
                 </a:solidFill>
                 <a:latin typeface="STHeiti"/>
               </a:rPr>
-              <a:t>1. Crescendo · 动机与难点</a:t>
+              <a:t>第 1 篇 · 动机与难点</a:t>
             </a:r>
           </a:p>
         </p:txBody>
@@ -21194,7 +21194,7 @@
                 </a:solidFill>
                 <a:latin typeface="STHeiti"/>
               </a:rPr>
-              <a:t>1. Crescendo · 模型</a:t>
+              <a:t>第 1 篇 · 模型</a:t>
             </a:r>
           </a:p>
         </p:txBody>
@@ -21543,7 +21543,7 @@
                 </a:solidFill>
                 <a:latin typeface="STHeiti"/>
               </a:rPr>
-              <a:t>1. Crescendo · 实验结果</a:t>
+              <a:t>第 1 篇 · 实验结果</a:t>
             </a:r>
           </a:p>
         </p:txBody>
@@ -22232,7 +22232,7 @@
                 </a:solidFill>
                 <a:latin typeface="STHeiti"/>
               </a:rPr>
-              <a:t>2. Beyond Single-Model Injection</a:t>
+              <a:t>第 2 篇</a:t>
             </a:r>
           </a:p>
         </p:txBody>

--- a/阶段2-卫星多智能体防御/presentations/卫星多智能体安全调研汇报.pptx
+++ b/阶段2-卫星多智能体防御/presentations/卫星多智能体安全调研汇报.pptx
@@ -3945,7 +3945,7 @@
         <p:spPr>
           <a:xfrm>
             <a:off x="566928" y="1481328"/>
-            <a:ext cx="11057839" cy="1403604"/>
+            <a:ext cx="5086605" cy="1956688"/>
           </a:xfrm>
           <a:prstGeom prst="rect">
             <a:avLst/>
@@ -3964,7 +3964,7 @@
               </a:spcAft>
             </a:pPr>
             <a:r>
-              <a:rPr sz="1350" b="0">
+              <a:rPr sz="1250" b="0">
                 <a:solidFill>
                   <a:srgbClr val="0E8F82"/>
                 </a:solidFill>
@@ -3973,7 +3973,7 @@
               <a:t>· </a:t>
             </a:r>
             <a:r>
-              <a:rPr sz="1350" b="0">
+              <a:rPr sz="1250" b="0">
                 <a:solidFill>
                   <a:srgbClr val="22272E"/>
                 </a:solidFill>
@@ -3989,7 +3989,7 @@
               </a:spcAft>
             </a:pPr>
             <a:r>
-              <a:rPr sz="1350" b="0">
+              <a:rPr sz="1250" b="0">
                 <a:solidFill>
                   <a:srgbClr val="0E8F82"/>
                 </a:solidFill>
@@ -3998,7 +3998,7 @@
               <a:t>· </a:t>
             </a:r>
             <a:r>
-              <a:rPr sz="1350" b="0">
+              <a:rPr sz="1250" b="0">
                 <a:solidFill>
                   <a:srgbClr val="22272E"/>
                 </a:solidFill>
@@ -4014,7 +4014,7 @@
               </a:spcAft>
             </a:pPr>
             <a:r>
-              <a:rPr sz="1350" b="0">
+              <a:rPr sz="1250" b="0">
                 <a:solidFill>
                   <a:srgbClr val="0E8F82"/>
                 </a:solidFill>
@@ -4023,7 +4023,7 @@
               <a:t>· </a:t>
             </a:r>
             <a:r>
-              <a:rPr sz="1350" b="0">
+              <a:rPr sz="1250" b="0">
                 <a:solidFill>
                   <a:srgbClr val="22272E"/>
                 </a:solidFill>
@@ -4039,7 +4039,7 @@
               </a:spcAft>
             </a:pPr>
             <a:r>
-              <a:rPr sz="1350" b="0">
+              <a:rPr sz="1250" b="0">
                 <a:solidFill>
                   <a:srgbClr val="0E8F82"/>
                 </a:solidFill>
@@ -4048,13 +4048,72 @@
               <a:t>· </a:t>
             </a:r>
             <a:r>
-              <a:rPr sz="1350" b="0">
+              <a:rPr sz="1250" b="0">
                 <a:solidFill>
                   <a:srgbClr val="22272E"/>
                 </a:solidFill>
                 <a:latin typeface="STHeiti"/>
               </a:rPr>
               <a:t>编排者在 14 个向量里被瞄准 8 次，是最脆弱的一环。</a:t>
+            </a:r>
+          </a:p>
+        </p:txBody>
+      </p:sp>
+      <p:pic>
+        <p:nvPicPr>
+          <p:cNvPr id="7" name="Picture 6" descr="t1-a1-attack.png"/>
+          <p:cNvPicPr>
+            <a:picLocks noChangeAspect="1"/>
+          </p:cNvPicPr>
+          <p:nvPr/>
+        </p:nvPicPr>
+        <p:blipFill>
+          <a:blip r:embed="rId2"/>
+          <a:stretch>
+            <a:fillRect/>
+          </a:stretch>
+        </p:blipFill>
+        <p:spPr>
+          <a:xfrm>
+            <a:off x="6716807" y="1426464"/>
+            <a:ext cx="4210446" cy="5010912"/>
+          </a:xfrm>
+          <a:prstGeom prst="rect">
+            <a:avLst/>
+          </a:prstGeom>
+        </p:spPr>
+      </p:pic>
+      <p:sp>
+        <p:nvSpPr>
+          <p:cNvPr id="8" name="TextBox 7"/>
+          <p:cNvSpPr txBox="1"/>
+          <p:nvPr/>
+        </p:nvSpPr>
+        <p:spPr>
+          <a:xfrm>
+            <a:off x="6019293" y="6510528"/>
+            <a:ext cx="5605474" cy="256032"/>
+          </a:xfrm>
+          <a:prstGeom prst="rect">
+            <a:avLst/>
+          </a:prstGeom>
+          <a:noFill/>
+        </p:spPr>
+        <p:txBody>
+          <a:bodyPr wrap="square" lIns="0" rIns="0" tIns="0" bIns="0">
+            <a:spAutoFit/>
+          </a:bodyPr>
+          <a:lstStyle/>
+          <a:p>
+            <a:pPr algn="ctr"/>
+            <a:r>
+              <a:rPr sz="1000" b="0">
+                <a:solidFill>
+                  <a:srgbClr val="5B6470"/>
+                </a:solidFill>
+                <a:latin typeface="STHeiti"/>
+              </a:rPr>
+              <a:t>论文 Table 1：四类 14 个攻击向量与实测成功率</a:t>
             </a:r>
           </a:p>
         </p:txBody>
@@ -4226,383 +4285,75 @@
           </a:p>
         </p:txBody>
       </p:sp>
-      <p:graphicFrame>
-        <p:nvGraphicFramePr>
-          <p:cNvPr id="6" name="Table 5"/>
-          <p:cNvGraphicFramePr>
-            <a:graphicFrameLocks noGrp="1"/>
-          </p:cNvGraphicFramePr>
-          <p:nvPr/>
-        </p:nvGraphicFramePr>
-        <p:xfrm>
-          <a:off x="566928" y="1463040"/>
-          <a:ext cx="11057837" cy="1645920"/>
-        </p:xfrm>
-        <a:graphic>
-          <a:graphicData uri="http://schemas.openxmlformats.org/drawingml/2006/table">
-            <a:tbl>
-              <a:tblPr firstRow="1">
-                <a:tableStyleId>{5C22544A-7EE6-4342-B048-85BDC9FD1C3A}</a:tableStyleId>
-              </a:tblPr>
-              <a:tblGrid>
-                <a:gridCol w="6117102"/>
-                <a:gridCol w="2352731"/>
-                <a:gridCol w="2588004"/>
-              </a:tblGrid>
-              <a:tr h="329184">
-                <a:tc>
-                  <a:txBody>
-                    <a:bodyPr/>
-                    <a:lstStyle/>
-                    <a:p>
-                      <a:r>
-                        <a:rPr sz="1200" b="1">
-                          <a:solidFill>
-                            <a:srgbClr val="FFFFFF"/>
-                          </a:solidFill>
-                          <a:latin typeface="STHeiti"/>
-                        </a:rPr>
-                        <a:t>攻击类别</a:t>
-                      </a:r>
-                    </a:p>
-                  </a:txBody>
-                  <a:tcPr marL="64008" marR="45720" marT="13716" marB="13716" anchor="ctr">
-                    <a:solidFill>
-                      <a:srgbClr val="0F2A4A"/>
-                    </a:solidFill>
-                  </a:tcPr>
-                </a:tc>
-                <a:tc>
-                  <a:txBody>
-                    <a:bodyPr/>
-                    <a:lstStyle/>
-                    <a:p>
-                      <a:r>
-                        <a:rPr sz="1200" b="1">
-                          <a:solidFill>
-                            <a:srgbClr val="FFFFFF"/>
-                          </a:solidFill>
-                          <a:latin typeface="STHeiti"/>
-                        </a:rPr>
-                        <a:t>基线</a:t>
-                      </a:r>
-                    </a:p>
-                  </a:txBody>
-                  <a:tcPr marL="64008" marR="45720" marT="13716" marB="13716" anchor="ctr">
-                    <a:solidFill>
-                      <a:srgbClr val="0F2A4A"/>
-                    </a:solidFill>
-                  </a:tcPr>
-                </a:tc>
-                <a:tc>
-                  <a:txBody>
-                    <a:bodyPr/>
-                    <a:lstStyle/>
-                    <a:p>
-                      <a:r>
-                        <a:rPr sz="1200" b="1">
-                          <a:solidFill>
-                            <a:srgbClr val="FFFFFF"/>
-                          </a:solidFill>
-                          <a:latin typeface="STHeiti"/>
-                        </a:rPr>
-                        <a:t>四层全上</a:t>
-                      </a:r>
-                    </a:p>
-                  </a:txBody>
-                  <a:tcPr marL="64008" marR="45720" marT="13716" marB="13716" anchor="ctr">
-                    <a:solidFill>
-                      <a:srgbClr val="0F2A4A"/>
-                    </a:solidFill>
-                  </a:tcPr>
-                </a:tc>
-              </a:tr>
-              <a:tr h="329184">
-                <a:tc>
-                  <a:txBody>
-                    <a:bodyPr/>
-                    <a:lstStyle/>
-                    <a:p>
-                      <a:r>
-                        <a:rPr sz="1250" b="0">
-                          <a:solidFill>
-                            <a:srgbClr val="22272E"/>
-                          </a:solidFill>
-                          <a:latin typeface="STHeiti"/>
-                        </a:rPr>
-                        <a:t>直接注入（用户输入）</a:t>
-                      </a:r>
-                    </a:p>
-                  </a:txBody>
-                  <a:tcPr marL="64008" marR="45720" marT="13716" marB="13716" anchor="ctr">
-                    <a:solidFill>
-                      <a:srgbClr val="FFFFFF"/>
-                    </a:solidFill>
-                  </a:tcPr>
-                </a:tc>
-                <a:tc>
-                  <a:txBody>
-                    <a:bodyPr/>
-                    <a:lstStyle/>
-                    <a:p>
-                      <a:r>
-                        <a:rPr sz="1250" b="0">
-                          <a:solidFill>
-                            <a:srgbClr val="22272E"/>
-                          </a:solidFill>
-                          <a:latin typeface="STHeiti"/>
-                        </a:rPr>
-                        <a:t>19%</a:t>
-                      </a:r>
-                    </a:p>
-                  </a:txBody>
-                  <a:tcPr marL="64008" marR="45720" marT="13716" marB="13716" anchor="ctr">
-                    <a:solidFill>
-                      <a:srgbClr val="FFFFFF"/>
-                    </a:solidFill>
-                  </a:tcPr>
-                </a:tc>
-                <a:tc>
-                  <a:txBody>
-                    <a:bodyPr/>
-                    <a:lstStyle/>
-                    <a:p>
-                      <a:r>
-                        <a:rPr sz="1250" b="0">
-                          <a:solidFill>
-                            <a:srgbClr val="22272E"/>
-                          </a:solidFill>
-                          <a:latin typeface="STHeiti"/>
-                        </a:rPr>
-                        <a:t>3.8%</a:t>
-                      </a:r>
-                    </a:p>
-                  </a:txBody>
-                  <a:tcPr marL="64008" marR="45720" marT="13716" marB="13716" anchor="ctr">
-                    <a:solidFill>
-                      <a:srgbClr val="FFFFFF"/>
-                    </a:solidFill>
-                  </a:tcPr>
-                </a:tc>
-              </a:tr>
-              <a:tr h="329184">
-                <a:tc>
-                  <a:txBody>
-                    <a:bodyPr/>
-                    <a:lstStyle/>
-                    <a:p>
-                      <a:r>
-                        <a:rPr sz="1250" b="1">
-                          <a:solidFill>
-                            <a:srgbClr val="22272E"/>
-                          </a:solidFill>
-                          <a:latin typeface="STHeiti"/>
-                        </a:rPr>
-                        <a:t>工具输出间接注入</a:t>
-                      </a:r>
-                    </a:p>
-                  </a:txBody>
-                  <a:tcPr marL="64008" marR="45720" marT="13716" marB="13716" anchor="ctr">
-                    <a:solidFill>
-                      <a:srgbClr val="F3F5F8"/>
-                    </a:solidFill>
-                  </a:tcPr>
-                </a:tc>
-                <a:tc>
-                  <a:txBody>
-                    <a:bodyPr/>
-                    <a:lstStyle/>
-                    <a:p>
-                      <a:r>
-                        <a:rPr sz="1250" b="1">
-                          <a:solidFill>
-                            <a:srgbClr val="22272E"/>
-                          </a:solidFill>
-                          <a:latin typeface="STHeiti"/>
-                        </a:rPr>
-                        <a:t>43%</a:t>
-                      </a:r>
-                    </a:p>
-                  </a:txBody>
-                  <a:tcPr marL="64008" marR="45720" marT="13716" marB="13716" anchor="ctr">
-                    <a:solidFill>
-                      <a:srgbClr val="F3F5F8"/>
-                    </a:solidFill>
-                  </a:tcPr>
-                </a:tc>
-                <a:tc>
-                  <a:txBody>
-                    <a:bodyPr/>
-                    <a:lstStyle/>
-                    <a:p>
-                      <a:r>
-                        <a:rPr sz="1250" b="0">
-                          <a:solidFill>
-                            <a:srgbClr val="22272E"/>
-                          </a:solidFill>
-                          <a:latin typeface="STHeiti"/>
-                        </a:rPr>
-                        <a:t>4.6%</a:t>
-                      </a:r>
-                    </a:p>
-                  </a:txBody>
-                  <a:tcPr marL="64008" marR="45720" marT="13716" marB="13716" anchor="ctr">
-                    <a:solidFill>
-                      <a:srgbClr val="F3F5F8"/>
-                    </a:solidFill>
-                  </a:tcPr>
-                </a:tc>
-              </a:tr>
-              <a:tr h="329184">
-                <a:tc>
-                  <a:txBody>
-                    <a:bodyPr/>
-                    <a:lstStyle/>
-                    <a:p>
-                      <a:r>
-                        <a:rPr sz="1250" b="1">
-                          <a:solidFill>
-                            <a:srgbClr val="22272E"/>
-                          </a:solidFill>
-                          <a:latin typeface="STHeiti"/>
-                        </a:rPr>
-                        <a:t>Agent 间消息注入</a:t>
-                      </a:r>
-                    </a:p>
-                  </a:txBody>
-                  <a:tcPr marL="64008" marR="45720" marT="13716" marB="13716" anchor="ctr">
-                    <a:solidFill>
-                      <a:srgbClr val="FFFFFF"/>
-                    </a:solidFill>
-                  </a:tcPr>
-                </a:tc>
-                <a:tc>
-                  <a:txBody>
-                    <a:bodyPr/>
-                    <a:lstStyle/>
-                    <a:p>
-                      <a:r>
-                        <a:rPr sz="1250" b="1">
-                          <a:solidFill>
-                            <a:srgbClr val="22272E"/>
-                          </a:solidFill>
-                          <a:latin typeface="STHeiti"/>
-                        </a:rPr>
-                        <a:t>31%</a:t>
-                      </a:r>
-                    </a:p>
-                  </a:txBody>
-                  <a:tcPr marL="64008" marR="45720" marT="13716" marB="13716" anchor="ctr">
-                    <a:solidFill>
-                      <a:srgbClr val="FFFFFF"/>
-                    </a:solidFill>
-                  </a:tcPr>
-                </a:tc>
-                <a:tc>
-                  <a:txBody>
-                    <a:bodyPr/>
-                    <a:lstStyle/>
-                    <a:p>
-                      <a:r>
-                        <a:rPr sz="1250" b="0">
-                          <a:solidFill>
-                            <a:srgbClr val="22272E"/>
-                          </a:solidFill>
-                          <a:latin typeface="STHeiti"/>
-                        </a:rPr>
-                        <a:t>1.2%</a:t>
-                      </a:r>
-                    </a:p>
-                  </a:txBody>
-                  <a:tcPr marL="64008" marR="45720" marT="13716" marB="13716" anchor="ctr">
-                    <a:solidFill>
-                      <a:srgbClr val="FFFFFF"/>
-                    </a:solidFill>
-                  </a:tcPr>
-                </a:tc>
-              </a:tr>
-              <a:tr h="329184">
-                <a:tc>
-                  <a:txBody>
-                    <a:bodyPr/>
-                    <a:lstStyle/>
-                    <a:p>
-                      <a:r>
-                        <a:rPr sz="1250" b="0">
-                          <a:solidFill>
-                            <a:srgbClr val="22272E"/>
-                          </a:solidFill>
-                          <a:latin typeface="STHeiti"/>
-                        </a:rPr>
-                        <a:t>级联注入（操控编排者）</a:t>
-                      </a:r>
-                    </a:p>
-                  </a:txBody>
-                  <a:tcPr marL="64008" marR="45720" marT="13716" marB="13716" anchor="ctr">
-                    <a:solidFill>
-                      <a:srgbClr val="F3F5F8"/>
-                    </a:solidFill>
-                  </a:tcPr>
-                </a:tc>
-                <a:tc>
-                  <a:txBody>
-                    <a:bodyPr/>
-                    <a:lstStyle/>
-                    <a:p>
-                      <a:r>
-                        <a:rPr sz="1250" b="0">
-                          <a:solidFill>
-                            <a:srgbClr val="22272E"/>
-                          </a:solidFill>
-                          <a:latin typeface="STHeiti"/>
-                        </a:rPr>
-                        <a:t>28%</a:t>
-                      </a:r>
-                    </a:p>
-                  </a:txBody>
-                  <a:tcPr marL="64008" marR="45720" marT="13716" marB="13716" anchor="ctr">
-                    <a:solidFill>
-                      <a:srgbClr val="F3F5F8"/>
-                    </a:solidFill>
-                  </a:tcPr>
-                </a:tc>
-                <a:tc>
-                  <a:txBody>
-                    <a:bodyPr/>
-                    <a:lstStyle/>
-                    <a:p>
-                      <a:r>
-                        <a:rPr sz="1250" b="0">
-                          <a:solidFill>
-                            <a:srgbClr val="22272E"/>
-                          </a:solidFill>
-                          <a:latin typeface="STHeiti"/>
-                        </a:rPr>
-                        <a:t>3.4%</a:t>
-                      </a:r>
-                    </a:p>
-                  </a:txBody>
-                  <a:tcPr marL="64008" marR="45720" marT="13716" marB="13716" anchor="ctr">
-                    <a:solidFill>
-                      <a:srgbClr val="F3F5F8"/>
-                    </a:solidFill>
-                  </a:tcPr>
-                </a:tc>
-              </a:tr>
-            </a:tbl>
-          </a:graphicData>
-        </a:graphic>
-      </p:graphicFrame>
-      <p:sp>
-        <p:nvSpPr>
-          <p:cNvPr id="7" name="Rounded Rectangle 6"/>
+      <p:pic>
+        <p:nvPicPr>
+          <p:cNvPr id="6" name="Picture 5" descr="t2-a1-defense.png"/>
+          <p:cNvPicPr>
+            <a:picLocks noChangeAspect="1"/>
+          </p:cNvPicPr>
+          <p:nvPr/>
+        </p:nvPicPr>
+        <p:blipFill>
+          <a:blip r:embed="rId2"/>
+          <a:stretch>
+            <a:fillRect/>
+          </a:stretch>
+        </p:blipFill>
+        <p:spPr>
+          <a:xfrm>
+            <a:off x="566928" y="1463040"/>
+            <a:ext cx="6413546" cy="3855937"/>
+          </a:xfrm>
+          <a:prstGeom prst="rect">
+            <a:avLst/>
+          </a:prstGeom>
+        </p:spPr>
+      </p:pic>
+      <p:sp>
+        <p:nvSpPr>
+          <p:cNvPr id="7" name="TextBox 6"/>
+          <p:cNvSpPr txBox="1"/>
+          <p:nvPr/>
+        </p:nvSpPr>
+        <p:spPr>
+          <a:xfrm>
+            <a:off x="566928" y="5392129"/>
+            <a:ext cx="6413546" cy="256032"/>
+          </a:xfrm>
+          <a:prstGeom prst="rect">
+            <a:avLst/>
+          </a:prstGeom>
+          <a:noFill/>
+        </p:spPr>
+        <p:txBody>
+          <a:bodyPr wrap="square" lIns="0" rIns="0" tIns="0" bIns="0">
+            <a:spAutoFit/>
+          </a:bodyPr>
+          <a:lstStyle/>
+          <a:p>
+            <a:pPr algn="ctr"/>
+            <a:r>
+              <a:rPr sz="1000" b="0">
+                <a:solidFill>
+                  <a:srgbClr val="5B6470"/>
+                </a:solidFill>
+                <a:latin typeface="STHeiti"/>
+              </a:rPr>
+              <a:t>论文 Table 2：每一层防御对四类攻击的效果</a:t>
+            </a:r>
+          </a:p>
+        </p:txBody>
+      </p:sp>
+      <p:sp>
+        <p:nvSpPr>
+          <p:cNvPr id="8" name="Rounded Rectangle 7"/>
           <p:cNvSpPr/>
           <p:nvPr/>
         </p:nvSpPr>
         <p:spPr>
           <a:xfrm>
-            <a:off x="566928" y="3328416"/>
-            <a:ext cx="3551834" cy="932688"/>
+            <a:off x="7309658" y="1463040"/>
+            <a:ext cx="4315109" cy="713232"/>
           </a:xfrm>
           <a:prstGeom prst="roundRect">
             <a:avLst>
@@ -4643,29 +4394,28 @@
       </p:sp>
       <p:sp>
         <p:nvSpPr>
-          <p:cNvPr id="8" name="TextBox 7"/>
-          <p:cNvSpPr txBox="1"/>
-          <p:nvPr/>
-        </p:nvSpPr>
-        <p:spPr>
-          <a:xfrm>
-            <a:off x="640080" y="3410712"/>
-            <a:ext cx="3405530" cy="768096"/>
-          </a:xfrm>
-          <a:prstGeom prst="rect">
-            <a:avLst/>
-          </a:prstGeom>
-          <a:noFill/>
-        </p:spPr>
-        <p:txBody>
-          <a:bodyPr wrap="square" lIns="0" rIns="0" tIns="0" bIns="0">
-            <a:spAutoFit/>
-          </a:bodyPr>
-          <a:lstStyle/>
-          <a:p>
-            <a:pPr algn="ctr"/>
-            <a:r>
-              <a:rPr sz="1700" b="1">
+          <p:cNvPr id="9" name="TextBox 8"/>
+          <p:cNvSpPr txBox="1"/>
+          <p:nvPr/>
+        </p:nvSpPr>
+        <p:spPr>
+          <a:xfrm>
+            <a:off x="7455962" y="1554480"/>
+            <a:ext cx="4022501" cy="530352"/>
+          </a:xfrm>
+          <a:prstGeom prst="rect">
+            <a:avLst/>
+          </a:prstGeom>
+          <a:noFill/>
+        </p:spPr>
+        <p:txBody>
+          <a:bodyPr wrap="square" lIns="0" rIns="0" tIns="0" bIns="0">
+            <a:spAutoFit/>
+          </a:bodyPr>
+          <a:lstStyle/>
+          <a:p>
+            <a:r>
+              <a:rPr sz="1500" b="1">
                 <a:solidFill>
                   <a:srgbClr val="0E8F82"/>
                 </a:solidFill>
@@ -4675,7 +4425,6 @@
             </a:r>
           </a:p>
           <a:p>
-            <a:pPr algn="ctr"/>
             <a:r>
               <a:rPr sz="1050" b="0">
                 <a:solidFill>
@@ -4690,14 +4439,14 @@
       </p:sp>
       <p:sp>
         <p:nvSpPr>
-          <p:cNvPr id="9" name="Rounded Rectangle 8"/>
+          <p:cNvPr id="10" name="Rounded Rectangle 9"/>
           <p:cNvSpPr/>
           <p:nvPr/>
         </p:nvSpPr>
         <p:spPr>
           <a:xfrm>
-            <a:off x="4319930" y="3328416"/>
-            <a:ext cx="3551834" cy="932688"/>
+            <a:off x="7309658" y="2322576"/>
+            <a:ext cx="4315109" cy="713232"/>
           </a:xfrm>
           <a:prstGeom prst="roundRect">
             <a:avLst>
@@ -4738,29 +4487,28 @@
       </p:sp>
       <p:sp>
         <p:nvSpPr>
-          <p:cNvPr id="10" name="TextBox 9"/>
-          <p:cNvSpPr txBox="1"/>
-          <p:nvPr/>
-        </p:nvSpPr>
-        <p:spPr>
-          <a:xfrm>
-            <a:off x="4393082" y="3410712"/>
-            <a:ext cx="3405530" cy="768096"/>
-          </a:xfrm>
-          <a:prstGeom prst="rect">
-            <a:avLst/>
-          </a:prstGeom>
-          <a:noFill/>
-        </p:spPr>
-        <p:txBody>
-          <a:bodyPr wrap="square" lIns="0" rIns="0" tIns="0" bIns="0">
-            <a:spAutoFit/>
-          </a:bodyPr>
-          <a:lstStyle/>
-          <a:p>
-            <a:pPr algn="ctr"/>
-            <a:r>
-              <a:rPr sz="1700" b="1">
+          <p:cNvPr id="11" name="TextBox 10"/>
+          <p:cNvSpPr txBox="1"/>
+          <p:nvPr/>
+        </p:nvSpPr>
+        <p:spPr>
+          <a:xfrm>
+            <a:off x="7455962" y="2414016"/>
+            <a:ext cx="4022501" cy="530352"/>
+          </a:xfrm>
+          <a:prstGeom prst="rect">
+            <a:avLst/>
+          </a:prstGeom>
+          <a:noFill/>
+        </p:spPr>
+        <p:txBody>
+          <a:bodyPr wrap="square" lIns="0" rIns="0" tIns="0" bIns="0">
+            <a:spAutoFit/>
+          </a:bodyPr>
+          <a:lstStyle/>
+          <a:p>
+            <a:r>
+              <a:rPr sz="1500" b="1">
                 <a:solidFill>
                   <a:srgbClr val="1F6FB2"/>
                 </a:solidFill>
@@ -4770,7 +4518,6 @@
             </a:r>
           </a:p>
           <a:p>
-            <a:pPr algn="ctr"/>
             <a:r>
               <a:rPr sz="1050" b="0">
                 <a:solidFill>
@@ -4785,14 +4532,14 @@
       </p:sp>
       <p:sp>
         <p:nvSpPr>
-          <p:cNvPr id="11" name="Rounded Rectangle 10"/>
+          <p:cNvPr id="12" name="Rounded Rectangle 11"/>
           <p:cNvSpPr/>
           <p:nvPr/>
         </p:nvSpPr>
         <p:spPr>
           <a:xfrm>
-            <a:off x="8072932" y="3328416"/>
-            <a:ext cx="3551834" cy="932688"/>
+            <a:off x="7309658" y="3182112"/>
+            <a:ext cx="4315109" cy="713232"/>
           </a:xfrm>
           <a:prstGeom prst="roundRect">
             <a:avLst>
@@ -4833,29 +4580,28 @@
       </p:sp>
       <p:sp>
         <p:nvSpPr>
-          <p:cNvPr id="12" name="TextBox 11"/>
-          <p:cNvSpPr txBox="1"/>
-          <p:nvPr/>
-        </p:nvSpPr>
-        <p:spPr>
-          <a:xfrm>
-            <a:off x="8146084" y="3410712"/>
-            <a:ext cx="3405530" cy="768096"/>
-          </a:xfrm>
-          <a:prstGeom prst="rect">
-            <a:avLst/>
-          </a:prstGeom>
-          <a:noFill/>
-        </p:spPr>
-        <p:txBody>
-          <a:bodyPr wrap="square" lIns="0" rIns="0" tIns="0" bIns="0">
-            <a:spAutoFit/>
-          </a:bodyPr>
-          <a:lstStyle/>
-          <a:p>
-            <a:pPr algn="ctr"/>
-            <a:r>
-              <a:rPr sz="1700" b="1">
+          <p:cNvPr id="13" name="TextBox 12"/>
+          <p:cNvSpPr txBox="1"/>
+          <p:nvPr/>
+        </p:nvSpPr>
+        <p:spPr>
+          <a:xfrm>
+            <a:off x="7455962" y="3273552"/>
+            <a:ext cx="4022501" cy="530352"/>
+          </a:xfrm>
+          <a:prstGeom prst="rect">
+            <a:avLst/>
+          </a:prstGeom>
+          <a:noFill/>
+        </p:spPr>
+        <p:txBody>
+          <a:bodyPr wrap="square" lIns="0" rIns="0" tIns="0" bIns="0">
+            <a:spAutoFit/>
+          </a:bodyPr>
+          <a:lstStyle/>
+          <a:p>
+            <a:r>
+              <a:rPr sz="1500" b="1">
                 <a:solidFill>
                   <a:srgbClr val="C86A00"/>
                 </a:solidFill>
@@ -4865,7 +4611,6 @@
             </a:r>
           </a:p>
           <a:p>
-            <a:pPr algn="ctr"/>
             <a:r>
               <a:rPr sz="1050" b="0">
                 <a:solidFill>
@@ -4880,14 +4625,14 @@
       </p:sp>
       <p:sp>
         <p:nvSpPr>
-          <p:cNvPr id="13" name="TextBox 12"/>
-          <p:cNvSpPr txBox="1"/>
-          <p:nvPr/>
-        </p:nvSpPr>
-        <p:spPr>
-          <a:xfrm>
-            <a:off x="566928" y="4443984"/>
-            <a:ext cx="11057839" cy="645414"/>
+          <p:cNvPr id="14" name="TextBox 13"/>
+          <p:cNvSpPr txBox="1"/>
+          <p:nvPr/>
+        </p:nvSpPr>
+        <p:spPr>
+          <a:xfrm>
+            <a:off x="7309658" y="4059936"/>
+            <a:ext cx="4315109" cy="1223264"/>
           </a:xfrm>
           <a:prstGeom prst="rect">
             <a:avLst/>
@@ -4906,7 +4651,7 @@
               </a:spcAft>
             </a:pPr>
             <a:r>
-              <a:rPr sz="1250" b="0">
+              <a:rPr sz="1200" b="0">
                 <a:solidFill>
                   <a:srgbClr val="0E8F82"/>
                 </a:solidFill>
@@ -4915,7 +4660,7 @@
               <a:t>· </a:t>
             </a:r>
             <a:r>
-              <a:rPr sz="1250" b="0">
+              <a:rPr sz="1200" b="0">
                 <a:solidFill>
                   <a:srgbClr val="22272E"/>
                 </a:solidFill>
@@ -4931,7 +4676,7 @@
               </a:spcAft>
             </a:pPr>
             <a:r>
-              <a:rPr sz="1250" b="0">
+              <a:rPr sz="1200" b="0">
                 <a:solidFill>
                   <a:srgbClr val="0E8F82"/>
                 </a:solidFill>
@@ -4940,7 +4685,7 @@
               <a:t>· </a:t>
             </a:r>
             <a:r>
-              <a:rPr sz="1250" b="1">
+              <a:rPr sz="1200" b="1">
                 <a:solidFill>
                   <a:srgbClr val="22272E"/>
                 </a:solidFill>
@@ -6248,180 +5993,75 @@
           </a:p>
         </p:txBody>
       </p:sp>
-      <p:graphicFrame>
-        <p:nvGraphicFramePr>
-          <p:cNvPr id="6" name="Table 5"/>
-          <p:cNvGraphicFramePr>
-            <a:graphicFrameLocks noGrp="1"/>
-          </p:cNvGraphicFramePr>
-          <p:nvPr/>
-        </p:nvGraphicFramePr>
-        <p:xfrm>
-          <a:off x="566928" y="1463040"/>
-          <a:ext cx="11057839" cy="987552"/>
-        </p:xfrm>
-        <a:graphic>
-          <a:graphicData uri="http://schemas.openxmlformats.org/drawingml/2006/table">
-            <a:tbl>
-              <a:tblPr firstRow="1">
-                <a:tableStyleId>{5C22544A-7EE6-4342-B048-85BDC9FD1C3A}</a:tableStyleId>
-              </a:tblPr>
-              <a:tblGrid>
-                <a:gridCol w="5954221"/>
-                <a:gridCol w="5103618"/>
-              </a:tblGrid>
-              <a:tr h="329184">
-                <a:tc>
-                  <a:txBody>
-                    <a:bodyPr/>
-                    <a:lstStyle/>
-                    <a:p>
-                      <a:r>
-                        <a:rPr sz="1200" b="1">
-                          <a:solidFill>
-                            <a:srgbClr val="FFFFFF"/>
-                          </a:solidFill>
-                          <a:latin typeface="STHeiti"/>
-                        </a:rPr>
-                        <a:t>评测方式</a:t>
-                      </a:r>
-                    </a:p>
-                  </a:txBody>
-                  <a:tcPr marL="64008" marR="45720" marT="13716" marB="13716" anchor="ctr">
-                    <a:solidFill>
-                      <a:srgbClr val="0F2A4A"/>
-                    </a:solidFill>
-                  </a:tcPr>
-                </a:tc>
-                <a:tc>
-                  <a:txBody>
-                    <a:bodyPr/>
-                    <a:lstStyle/>
-                    <a:p>
-                      <a:r>
-                        <a:rPr sz="1200" b="1">
-                          <a:solidFill>
-                            <a:srgbClr val="FFFFFF"/>
-                          </a:solidFill>
-                          <a:latin typeface="STHeiti"/>
-                        </a:rPr>
-                        <a:t>攻击成功率</a:t>
-                      </a:r>
-                    </a:p>
-                  </a:txBody>
-                  <a:tcPr marL="64008" marR="45720" marT="13716" marB="13716" anchor="ctr">
-                    <a:solidFill>
-                      <a:srgbClr val="0F2A4A"/>
-                    </a:solidFill>
-                  </a:tcPr>
-                </a:tc>
-              </a:tr>
-              <a:tr h="329184">
-                <a:tc>
-                  <a:txBody>
-                    <a:bodyPr/>
-                    <a:lstStyle/>
-                    <a:p>
-                      <a:r>
-                        <a:rPr sz="1250" b="1">
-                          <a:solidFill>
-                            <a:srgbClr val="22272E"/>
-                          </a:solidFill>
-                          <a:latin typeface="STHeiti"/>
-                        </a:rPr>
-                        <a:t>只算第一轮</a:t>
-                      </a:r>
-                    </a:p>
-                  </a:txBody>
-                  <a:tcPr marL="64008" marR="45720" marT="13716" marB="13716" anchor="ctr">
-                    <a:solidFill>
-                      <a:srgbClr val="FFFFFF"/>
-                    </a:solidFill>
-                  </a:tcPr>
-                </a:tc>
-                <a:tc>
-                  <a:txBody>
-                    <a:bodyPr/>
-                    <a:lstStyle/>
-                    <a:p>
-                      <a:r>
-                        <a:rPr sz="1250" b="1">
-                          <a:solidFill>
-                            <a:srgbClr val="22272E"/>
-                          </a:solidFill>
-                          <a:latin typeface="STHeiti"/>
-                        </a:rPr>
-                        <a:t>0–1%</a:t>
-                      </a:r>
-                    </a:p>
-                  </a:txBody>
-                  <a:tcPr marL="64008" marR="45720" marT="13716" marB="13716" anchor="ctr">
-                    <a:solidFill>
-                      <a:srgbClr val="FFFFFF"/>
-                    </a:solidFill>
-                  </a:tcPr>
-                </a:tc>
-              </a:tr>
-              <a:tr h="329184">
-                <a:tc>
-                  <a:txBody>
-                    <a:bodyPr/>
-                    <a:lstStyle/>
-                    <a:p>
-                      <a:r>
-                        <a:rPr sz="1250" b="1">
-                          <a:solidFill>
-                            <a:srgbClr val="22272E"/>
-                          </a:solidFill>
-                          <a:latin typeface="STHeiti"/>
-                        </a:rPr>
-                        <a:t>允许 15 轮</a:t>
-                      </a:r>
-                    </a:p>
-                  </a:txBody>
-                  <a:tcPr marL="64008" marR="45720" marT="13716" marB="13716" anchor="ctr">
-                    <a:solidFill>
-                      <a:srgbClr val="F3F5F8"/>
-                    </a:solidFill>
-                  </a:tcPr>
-                </a:tc>
-                <a:tc>
-                  <a:txBody>
-                    <a:bodyPr/>
-                    <a:lstStyle/>
-                    <a:p>
-                      <a:r>
-                        <a:rPr sz="1250" b="1">
-                          <a:solidFill>
-                            <a:srgbClr val="22272E"/>
-                          </a:solidFill>
-                          <a:latin typeface="STHeiti"/>
-                        </a:rPr>
-                        <a:t>7.9–16.8%</a:t>
-                      </a:r>
-                    </a:p>
-                  </a:txBody>
-                  <a:tcPr marL="64008" marR="45720" marT="13716" marB="13716" anchor="ctr">
-                    <a:solidFill>
-                      <a:srgbClr val="F3F5F8"/>
-                    </a:solidFill>
-                  </a:tcPr>
-                </a:tc>
-              </a:tr>
-            </a:tbl>
-          </a:graphicData>
-        </a:graphic>
-      </p:graphicFrame>
-      <p:sp>
-        <p:nvSpPr>
-          <p:cNvPr id="7" name="Rounded Rectangle 6"/>
+      <p:pic>
+        <p:nvPicPr>
+          <p:cNvPr id="6" name="Picture 5" descr="t5-aa-matrix.png"/>
+          <p:cNvPicPr>
+            <a:picLocks noChangeAspect="1"/>
+          </p:cNvPicPr>
+          <p:nvPr/>
+        </p:nvPicPr>
+        <p:blipFill>
+          <a:blip r:embed="rId2"/>
+          <a:stretch>
+            <a:fillRect/>
+          </a:stretch>
+        </p:blipFill>
+        <p:spPr>
+          <a:xfrm>
+            <a:off x="566928" y="1463040"/>
+            <a:ext cx="11057838" cy="2302263"/>
+          </a:xfrm>
+          <a:prstGeom prst="rect">
+            <a:avLst/>
+          </a:prstGeom>
+        </p:spPr>
+      </p:pic>
+      <p:sp>
+        <p:nvSpPr>
+          <p:cNvPr id="7" name="TextBox 6"/>
+          <p:cNvSpPr txBox="1"/>
+          <p:nvPr/>
+        </p:nvSpPr>
+        <p:spPr>
+          <a:xfrm>
+            <a:off x="566928" y="3838455"/>
+            <a:ext cx="11057839" cy="256032"/>
+          </a:xfrm>
+          <a:prstGeom prst="rect">
+            <a:avLst/>
+          </a:prstGeom>
+          <a:noFill/>
+        </p:spPr>
+        <p:txBody>
+          <a:bodyPr wrap="square" lIns="0" rIns="0" tIns="0" bIns="0">
+            <a:spAutoFit/>
+          </a:bodyPr>
+          <a:lstStyle/>
+          <a:p>
+            <a:pPr algn="ctr"/>
+            <a:r>
+              <a:rPr sz="1000" b="0">
+                <a:solidFill>
+                  <a:srgbClr val="5B6470"/>
+                </a:solidFill>
+                <a:latin typeface="STHeiti"/>
+              </a:rPr>
+              <a:t>论文 Table 3：前沿矩阵（3×3 攻击方—防守方，聚合 21 个场景）</a:t>
+            </a:r>
+          </a:p>
+        </p:txBody>
+      </p:sp>
+      <p:sp>
+        <p:nvSpPr>
+          <p:cNvPr id="8" name="Rounded Rectangle 7"/>
           <p:cNvSpPr/>
           <p:nvPr/>
         </p:nvSpPr>
         <p:spPr>
           <a:xfrm>
-            <a:off x="566928" y="2670048"/>
-            <a:ext cx="3551834" cy="932688"/>
+            <a:off x="566928" y="4295655"/>
+            <a:ext cx="3551834" cy="841248"/>
           </a:xfrm>
           <a:prstGeom prst="roundRect">
             <a:avLst>
@@ -6462,14 +6102,14 @@
       </p:sp>
       <p:sp>
         <p:nvSpPr>
-          <p:cNvPr id="8" name="TextBox 7"/>
-          <p:cNvSpPr txBox="1"/>
-          <p:nvPr/>
-        </p:nvSpPr>
-        <p:spPr>
-          <a:xfrm>
-            <a:off x="640080" y="2752344"/>
-            <a:ext cx="3405530" cy="768096"/>
+          <p:cNvPr id="9" name="TextBox 8"/>
+          <p:cNvSpPr txBox="1"/>
+          <p:nvPr/>
+        </p:nvSpPr>
+        <p:spPr>
+          <a:xfrm>
+            <a:off x="640080" y="4377951"/>
+            <a:ext cx="3405530" cy="676656"/>
           </a:xfrm>
           <a:prstGeom prst="rect">
             <a:avLst/>
@@ -6484,7 +6124,7 @@
           <a:p>
             <a:pPr algn="ctr"/>
             <a:r>
-              <a:rPr sz="1700" b="1">
+              <a:rPr sz="1500" b="1">
                 <a:solidFill>
                   <a:srgbClr val="1F6FB2"/>
                 </a:solidFill>
@@ -6509,14 +6149,14 @@
       </p:sp>
       <p:sp>
         <p:nvSpPr>
-          <p:cNvPr id="9" name="Rounded Rectangle 8"/>
+          <p:cNvPr id="10" name="Rounded Rectangle 9"/>
           <p:cNvSpPr/>
           <p:nvPr/>
         </p:nvSpPr>
         <p:spPr>
           <a:xfrm>
-            <a:off x="4319930" y="2670048"/>
-            <a:ext cx="3551834" cy="932688"/>
+            <a:off x="4319930" y="4295655"/>
+            <a:ext cx="3551834" cy="841248"/>
           </a:xfrm>
           <a:prstGeom prst="roundRect">
             <a:avLst>
@@ -6557,14 +6197,14 @@
       </p:sp>
       <p:sp>
         <p:nvSpPr>
-          <p:cNvPr id="10" name="TextBox 9"/>
-          <p:cNvSpPr txBox="1"/>
-          <p:nvPr/>
-        </p:nvSpPr>
-        <p:spPr>
-          <a:xfrm>
-            <a:off x="4393082" y="2752344"/>
-            <a:ext cx="3405530" cy="768096"/>
+          <p:cNvPr id="11" name="TextBox 10"/>
+          <p:cNvSpPr txBox="1"/>
+          <p:nvPr/>
+        </p:nvSpPr>
+        <p:spPr>
+          <a:xfrm>
+            <a:off x="4393082" y="4377951"/>
+            <a:ext cx="3405530" cy="676656"/>
           </a:xfrm>
           <a:prstGeom prst="rect">
             <a:avLst/>
@@ -6579,7 +6219,7 @@
           <a:p>
             <a:pPr algn="ctr"/>
             <a:r>
-              <a:rPr sz="1700" b="1">
+              <a:rPr sz="1500" b="1">
                 <a:solidFill>
                   <a:srgbClr val="0E8F82"/>
                 </a:solidFill>
@@ -6604,14 +6244,14 @@
       </p:sp>
       <p:sp>
         <p:nvSpPr>
-          <p:cNvPr id="11" name="Rounded Rectangle 10"/>
+          <p:cNvPr id="12" name="Rounded Rectangle 11"/>
           <p:cNvSpPr/>
           <p:nvPr/>
         </p:nvSpPr>
         <p:spPr>
           <a:xfrm>
-            <a:off x="8072932" y="2670048"/>
-            <a:ext cx="3551834" cy="932688"/>
+            <a:off x="8072932" y="4295655"/>
+            <a:ext cx="3551834" cy="841248"/>
           </a:xfrm>
           <a:prstGeom prst="roundRect">
             <a:avLst>
@@ -6652,14 +6292,14 @@
       </p:sp>
       <p:sp>
         <p:nvSpPr>
-          <p:cNvPr id="12" name="TextBox 11"/>
-          <p:cNvSpPr txBox="1"/>
-          <p:nvPr/>
-        </p:nvSpPr>
-        <p:spPr>
-          <a:xfrm>
-            <a:off x="8146084" y="2752344"/>
-            <a:ext cx="3405530" cy="768096"/>
+          <p:cNvPr id="13" name="TextBox 12"/>
+          <p:cNvSpPr txBox="1"/>
+          <p:nvPr/>
+        </p:nvSpPr>
+        <p:spPr>
+          <a:xfrm>
+            <a:off x="8146084" y="4377951"/>
+            <a:ext cx="3405530" cy="676656"/>
           </a:xfrm>
           <a:prstGeom prst="rect">
             <a:avLst/>
@@ -6674,7 +6314,7 @@
           <a:p>
             <a:pPr algn="ctr"/>
             <a:r>
-              <a:rPr sz="1700" b="1">
+              <a:rPr sz="1500" b="1">
                 <a:solidFill>
                   <a:srgbClr val="B3261E"/>
                 </a:solidFill>
@@ -6699,14 +6339,14 @@
       </p:sp>
       <p:sp>
         <p:nvSpPr>
-          <p:cNvPr id="13" name="TextBox 12"/>
-          <p:cNvSpPr txBox="1"/>
-          <p:nvPr/>
-        </p:nvSpPr>
-        <p:spPr>
-          <a:xfrm>
-            <a:off x="566928" y="3785616"/>
-            <a:ext cx="11057839" cy="350139"/>
+          <p:cNvPr id="14" name="TextBox 13"/>
+          <p:cNvSpPr txBox="1"/>
+          <p:nvPr/>
+        </p:nvSpPr>
+        <p:spPr>
+          <a:xfrm>
+            <a:off x="566928" y="5283207"/>
+            <a:ext cx="11057839" cy="329184"/>
           </a:xfrm>
           <a:prstGeom prst="rect">
             <a:avLst/>
@@ -6721,11 +6361,11 @@
           <a:p>
             <a:pPr>
               <a:spcAft>
-                <a:spcPts val="700"/>
+                <a:spcPts val="600"/>
               </a:spcAft>
             </a:pPr>
             <a:r>
-              <a:rPr sz="1250" b="0">
+              <a:rPr sz="1200" b="0">
                 <a:solidFill>
                   <a:srgbClr val="0E8F82"/>
                 </a:solidFill>
@@ -6734,7 +6374,7 @@
               <a:t>· </a:t>
             </a:r>
             <a:r>
-              <a:rPr sz="1250" b="1">
+              <a:rPr sz="1200" b="1">
                 <a:solidFill>
                   <a:srgbClr val="22272E"/>
                 </a:solidFill>
@@ -8806,494 +8446,75 @@
           </a:p>
         </p:txBody>
       </p:sp>
-      <p:graphicFrame>
-        <p:nvGraphicFramePr>
-          <p:cNvPr id="6" name="Table 5"/>
-          <p:cNvGraphicFramePr>
-            <a:graphicFrameLocks noGrp="1"/>
-          </p:cNvGraphicFramePr>
-          <p:nvPr/>
-        </p:nvGraphicFramePr>
-        <p:xfrm>
-          <a:off x="566928" y="1463040"/>
-          <a:ext cx="11057836" cy="1645920"/>
-        </p:xfrm>
-        <a:graphic>
-          <a:graphicData uri="http://schemas.openxmlformats.org/drawingml/2006/table">
-            <a:tbl>
-              <a:tblPr firstRow="1">
-                <a:tableStyleId>{5C22544A-7EE6-4342-B048-85BDC9FD1C3A}</a:tableStyleId>
-              </a:tblPr>
-              <a:tblGrid>
-                <a:gridCol w="3769717"/>
-                <a:gridCol w="2764459"/>
-                <a:gridCol w="2261830"/>
-                <a:gridCol w="2261830"/>
-              </a:tblGrid>
-              <a:tr h="329184">
-                <a:tc>
-                  <a:txBody>
-                    <a:bodyPr/>
-                    <a:lstStyle/>
-                    <a:p>
-                      <a:r>
-                        <a:rPr sz="1200" b="1">
-                          <a:solidFill>
-                            <a:srgbClr val="FFFFFF"/>
-                          </a:solidFill>
-                          <a:latin typeface="STHeiti"/>
-                        </a:rPr>
-                        <a:t>攻击</a:t>
-                      </a:r>
-                    </a:p>
-                  </a:txBody>
-                  <a:tcPr marL="64008" marR="45720" marT="13716" marB="13716" anchor="ctr">
-                    <a:solidFill>
-                      <a:srgbClr val="0F2A4A"/>
-                    </a:solidFill>
-                  </a:tcPr>
-                </a:tc>
-                <a:tc>
-                  <a:txBody>
-                    <a:bodyPr/>
-                    <a:lstStyle/>
-                    <a:p>
-                      <a:r>
-                        <a:rPr sz="1200" b="1">
-                          <a:solidFill>
-                            <a:srgbClr val="FFFFFF"/>
-                          </a:solidFill>
-                          <a:latin typeface="STHeiti"/>
-                        </a:rPr>
-                        <a:t>条件</a:t>
-                      </a:r>
-                    </a:p>
-                  </a:txBody>
-                  <a:tcPr marL="64008" marR="45720" marT="13716" marB="13716" anchor="ctr">
-                    <a:solidFill>
-                      <a:srgbClr val="0F2A4A"/>
-                    </a:solidFill>
-                  </a:tcPr>
-                </a:tc>
-                <a:tc>
-                  <a:txBody>
-                    <a:bodyPr/>
-                    <a:lstStyle/>
-                    <a:p>
-                      <a:r>
-                        <a:rPr sz="1200" b="1">
-                          <a:solidFill>
-                            <a:srgbClr val="FFFFFF"/>
-                          </a:solidFill>
-                          <a:latin typeface="STHeiti"/>
-                        </a:rPr>
-                        <a:t>UAR</a:t>
-                      </a:r>
-                    </a:p>
-                  </a:txBody>
-                  <a:tcPr marL="64008" marR="45720" marT="13716" marB="13716" anchor="ctr">
-                    <a:solidFill>
-                      <a:srgbClr val="0F2A4A"/>
-                    </a:solidFill>
-                  </a:tcPr>
-                </a:tc>
-                <a:tc>
-                  <a:txBody>
-                    <a:bodyPr/>
-                    <a:lstStyle/>
-                    <a:p>
-                      <a:r>
-                        <a:rPr sz="1200" b="1">
-                          <a:solidFill>
-                            <a:srgbClr val="FFFFFF"/>
-                          </a:solidFill>
-                          <a:latin typeface="STHeiti"/>
-                        </a:rPr>
-                        <a:t>JBR</a:t>
-                      </a:r>
-                    </a:p>
-                  </a:txBody>
-                  <a:tcPr marL="64008" marR="45720" marT="13716" marB="13716" anchor="ctr">
-                    <a:solidFill>
-                      <a:srgbClr val="0F2A4A"/>
-                    </a:solidFill>
-                  </a:tcPr>
-                </a:tc>
-              </a:tr>
-              <a:tr h="329184">
-                <a:tc>
-                  <a:txBody>
-                    <a:bodyPr/>
-                    <a:lstStyle/>
-                    <a:p>
-                      <a:r>
-                        <a:rPr sz="1250" b="0">
-                          <a:solidFill>
-                            <a:srgbClr val="22272E"/>
-                          </a:solidFill>
-                          <a:latin typeface="STHeiti"/>
-                        </a:rPr>
-                        <a:t>记忆投毒</a:t>
-                      </a:r>
-                    </a:p>
-                  </a:txBody>
-                  <a:tcPr marL="64008" marR="45720" marT="13716" marB="13716" anchor="ctr">
-                    <a:solidFill>
-                      <a:srgbClr val="FFFFFF"/>
-                    </a:solidFill>
-                  </a:tcPr>
-                </a:tc>
-                <a:tc>
-                  <a:txBody>
-                    <a:bodyPr/>
-                    <a:lstStyle/>
-                    <a:p>
-                      <a:r>
-                        <a:rPr sz="1250" b="0">
-                          <a:solidFill>
-                            <a:srgbClr val="22272E"/>
-                          </a:solidFill>
-                          <a:latin typeface="STHeiti"/>
-                        </a:rPr>
-                        <a:t>无授权</a:t>
-                      </a:r>
-                    </a:p>
-                  </a:txBody>
-                  <a:tcPr marL="64008" marR="45720" marT="13716" marB="13716" anchor="ctr">
-                    <a:solidFill>
-                      <a:srgbClr val="FFFFFF"/>
-                    </a:solidFill>
-                  </a:tcPr>
-                </a:tc>
-                <a:tc>
-                  <a:txBody>
-                    <a:bodyPr/>
-                    <a:lstStyle/>
-                    <a:p>
-                      <a:r>
-                        <a:rPr sz="1250" b="1">
-                          <a:solidFill>
-                            <a:srgbClr val="22272E"/>
-                          </a:solidFill>
-                          <a:latin typeface="STHeiti"/>
-                        </a:rPr>
-                        <a:t>100%</a:t>
-                      </a:r>
-                    </a:p>
-                  </a:txBody>
-                  <a:tcPr marL="64008" marR="45720" marT="13716" marB="13716" anchor="ctr">
-                    <a:solidFill>
-                      <a:srgbClr val="FFFFFF"/>
-                    </a:solidFill>
-                  </a:tcPr>
-                </a:tc>
-                <a:tc>
-                  <a:txBody>
-                    <a:bodyPr/>
-                    <a:lstStyle/>
-                    <a:p>
-                      <a:r>
-                        <a:rPr sz="1250" b="0">
-                          <a:solidFill>
-                            <a:srgbClr val="22272E"/>
-                          </a:solidFill>
-                          <a:latin typeface="STHeiti"/>
-                        </a:rPr>
-                        <a:t>100%</a:t>
-                      </a:r>
-                    </a:p>
-                  </a:txBody>
-                  <a:tcPr marL="64008" marR="45720" marT="13716" marB="13716" anchor="ctr">
-                    <a:solidFill>
-                      <a:srgbClr val="FFFFFF"/>
-                    </a:solidFill>
-                  </a:tcPr>
-                </a:tc>
-              </a:tr>
-              <a:tr h="329184">
-                <a:tc>
-                  <a:txBody>
-                    <a:bodyPr/>
-                    <a:lstStyle/>
-                    <a:p>
-                      <a:r>
-                        <a:rPr sz="1250" b="0">
-                          <a:solidFill>
-                            <a:srgbClr val="22272E"/>
-                          </a:solidFill>
-                          <a:latin typeface="STHeiti"/>
-                        </a:rPr>
-                        <a:t>记忆投毒</a:t>
-                      </a:r>
-                    </a:p>
-                  </a:txBody>
-                  <a:tcPr marL="64008" marR="45720" marT="13716" marB="13716" anchor="ctr">
-                    <a:solidFill>
-                      <a:srgbClr val="F3F5F8"/>
-                    </a:solidFill>
-                  </a:tcPr>
-                </a:tc>
-                <a:tc>
-                  <a:txBody>
-                    <a:bodyPr/>
-                    <a:lstStyle/>
-                    <a:p>
-                      <a:r>
-                        <a:rPr sz="1250" b="1">
-                          <a:solidFill>
-                            <a:srgbClr val="22272E"/>
-                          </a:solidFill>
-                          <a:latin typeface="STHeiti"/>
-                        </a:rPr>
-                        <a:t>有授权</a:t>
-                      </a:r>
-                    </a:p>
-                  </a:txBody>
-                  <a:tcPr marL="64008" marR="45720" marT="13716" marB="13716" anchor="ctr">
-                    <a:solidFill>
-                      <a:srgbClr val="F3F5F8"/>
-                    </a:solidFill>
-                  </a:tcPr>
-                </a:tc>
-                <a:tc>
-                  <a:txBody>
-                    <a:bodyPr/>
-                    <a:lstStyle/>
-                    <a:p>
-                      <a:r>
-                        <a:rPr sz="1250" b="1">
-                          <a:solidFill>
-                            <a:srgbClr val="22272E"/>
-                          </a:solidFill>
-                          <a:latin typeface="STHeiti"/>
-                        </a:rPr>
-                        <a:t>0%</a:t>
-                      </a:r>
-                    </a:p>
-                  </a:txBody>
-                  <a:tcPr marL="64008" marR="45720" marT="13716" marB="13716" anchor="ctr">
-                    <a:solidFill>
-                      <a:srgbClr val="F3F5F8"/>
-                    </a:solidFill>
-                  </a:tcPr>
-                </a:tc>
-                <a:tc>
-                  <a:txBody>
-                    <a:bodyPr/>
-                    <a:lstStyle/>
-                    <a:p>
-                      <a:r>
-                        <a:rPr sz="1250" b="1">
-                          <a:solidFill>
-                            <a:srgbClr val="22272E"/>
-                          </a:solidFill>
-                          <a:latin typeface="STHeiti"/>
-                        </a:rPr>
-                        <a:t>100%</a:t>
-                      </a:r>
-                    </a:p>
-                  </a:txBody>
-                  <a:tcPr marL="64008" marR="45720" marT="13716" marB="13716" anchor="ctr">
-                    <a:solidFill>
-                      <a:srgbClr val="F3F5F8"/>
-                    </a:solidFill>
-                  </a:tcPr>
-                </a:tc>
-              </a:tr>
-              <a:tr h="329184">
-                <a:tc>
-                  <a:txBody>
-                    <a:bodyPr/>
-                    <a:lstStyle/>
-                    <a:p>
-                      <a:r>
-                        <a:rPr sz="1250" b="0">
-                          <a:solidFill>
-                            <a:srgbClr val="22272E"/>
-                          </a:solidFill>
-                          <a:latin typeface="STHeiti"/>
-                        </a:rPr>
-                        <a:t>Agent 劫持</a:t>
-                      </a:r>
-                    </a:p>
-                  </a:txBody>
-                  <a:tcPr marL="64008" marR="45720" marT="13716" marB="13716" anchor="ctr">
-                    <a:solidFill>
-                      <a:srgbClr val="FFFFFF"/>
-                    </a:solidFill>
-                  </a:tcPr>
-                </a:tc>
-                <a:tc>
-                  <a:txBody>
-                    <a:bodyPr/>
-                    <a:lstStyle/>
-                    <a:p>
-                      <a:r>
-                        <a:rPr sz="1250" b="0">
-                          <a:solidFill>
-                            <a:srgbClr val="22272E"/>
-                          </a:solidFill>
-                          <a:latin typeface="STHeiti"/>
-                        </a:rPr>
-                        <a:t>无授权</a:t>
-                      </a:r>
-                    </a:p>
-                  </a:txBody>
-                  <a:tcPr marL="64008" marR="45720" marT="13716" marB="13716" anchor="ctr">
-                    <a:solidFill>
-                      <a:srgbClr val="FFFFFF"/>
-                    </a:solidFill>
-                  </a:tcPr>
-                </a:tc>
-                <a:tc>
-                  <a:txBody>
-                    <a:bodyPr/>
-                    <a:lstStyle/>
-                    <a:p>
-                      <a:r>
-                        <a:rPr sz="1250" b="0">
-                          <a:solidFill>
-                            <a:srgbClr val="22272E"/>
-                          </a:solidFill>
-                          <a:latin typeface="STHeiti"/>
-                        </a:rPr>
-                        <a:t>0%</a:t>
-                      </a:r>
-                    </a:p>
-                  </a:txBody>
-                  <a:tcPr marL="64008" marR="45720" marT="13716" marB="13716" anchor="ctr">
-                    <a:solidFill>
-                      <a:srgbClr val="FFFFFF"/>
-                    </a:solidFill>
-                  </a:tcPr>
-                </a:tc>
-                <a:tc>
-                  <a:txBody>
-                    <a:bodyPr/>
-                    <a:lstStyle/>
-                    <a:p>
-                      <a:r>
-                        <a:rPr sz="1250" b="0">
-                          <a:solidFill>
-                            <a:srgbClr val="22272E"/>
-                          </a:solidFill>
-                          <a:latin typeface="STHeiti"/>
-                        </a:rPr>
-                        <a:t>0%</a:t>
-                      </a:r>
-                    </a:p>
-                  </a:txBody>
-                  <a:tcPr marL="64008" marR="45720" marT="13716" marB="13716" anchor="ctr">
-                    <a:solidFill>
-                      <a:srgbClr val="FFFFFF"/>
-                    </a:solidFill>
-                  </a:tcPr>
-                </a:tc>
-              </a:tr>
-              <a:tr h="329184">
-                <a:tc>
-                  <a:txBody>
-                    <a:bodyPr/>
-                    <a:lstStyle/>
-                    <a:p>
-                      <a:r>
-                        <a:rPr sz="1250" b="0">
-                          <a:solidFill>
-                            <a:srgbClr val="22272E"/>
-                          </a:solidFill>
-                          <a:latin typeface="STHeiti"/>
-                        </a:rPr>
-                        <a:t>Agent 劫持</a:t>
-                      </a:r>
-                    </a:p>
-                  </a:txBody>
-                  <a:tcPr marL="64008" marR="45720" marT="13716" marB="13716" anchor="ctr">
-                    <a:solidFill>
-                      <a:srgbClr val="F3F5F8"/>
-                    </a:solidFill>
-                  </a:tcPr>
-                </a:tc>
-                <a:tc>
-                  <a:txBody>
-                    <a:bodyPr/>
-                    <a:lstStyle/>
-                    <a:p>
-                      <a:r>
-                        <a:rPr sz="1250" b="0">
-                          <a:solidFill>
-                            <a:srgbClr val="22272E"/>
-                          </a:solidFill>
-                          <a:latin typeface="STHeiti"/>
-                        </a:rPr>
-                        <a:t>有授权</a:t>
-                      </a:r>
-                    </a:p>
-                  </a:txBody>
-                  <a:tcPr marL="64008" marR="45720" marT="13716" marB="13716" anchor="ctr">
-                    <a:solidFill>
-                      <a:srgbClr val="F3F5F8"/>
-                    </a:solidFill>
-                  </a:tcPr>
-                </a:tc>
-                <a:tc>
-                  <a:txBody>
-                    <a:bodyPr/>
-                    <a:lstStyle/>
-                    <a:p>
-                      <a:r>
-                        <a:rPr sz="1250" b="0">
-                          <a:solidFill>
-                            <a:srgbClr val="22272E"/>
-                          </a:solidFill>
-                          <a:latin typeface="STHeiti"/>
-                        </a:rPr>
-                        <a:t>0%</a:t>
-                      </a:r>
-                    </a:p>
-                  </a:txBody>
-                  <a:tcPr marL="64008" marR="45720" marT="13716" marB="13716" anchor="ctr">
-                    <a:solidFill>
-                      <a:srgbClr val="F3F5F8"/>
-                    </a:solidFill>
-                  </a:tcPr>
-                </a:tc>
-                <a:tc>
-                  <a:txBody>
-                    <a:bodyPr/>
-                    <a:lstStyle/>
-                    <a:p>
-                      <a:r>
-                        <a:rPr sz="1250" b="0">
-                          <a:solidFill>
-                            <a:srgbClr val="22272E"/>
-                          </a:solidFill>
-                          <a:latin typeface="STHeiti"/>
-                        </a:rPr>
-                        <a:t>0%</a:t>
-                      </a:r>
-                    </a:p>
-                  </a:txBody>
-                  <a:tcPr marL="64008" marR="45720" marT="13716" marB="13716" anchor="ctr">
-                    <a:solidFill>
-                      <a:srgbClr val="F3F5F8"/>
-                    </a:solidFill>
-                  </a:tcPr>
-                </a:tc>
-              </a:tr>
-            </a:tbl>
-          </a:graphicData>
-        </a:graphic>
-      </p:graphicFrame>
-      <p:sp>
-        <p:nvSpPr>
-          <p:cNvPr id="7" name="Rounded Rectangle 6"/>
+      <p:pic>
+        <p:nvPicPr>
+          <p:cNvPr id="6" name="Picture 5" descr="t3-a2-tiers.png"/>
+          <p:cNvPicPr>
+            <a:picLocks noChangeAspect="1"/>
+          </p:cNvPicPr>
+          <p:nvPr/>
+        </p:nvPicPr>
+        <p:blipFill>
+          <a:blip r:embed="rId2"/>
+          <a:stretch>
+            <a:fillRect/>
+          </a:stretch>
+        </p:blipFill>
+        <p:spPr>
+          <a:xfrm>
+            <a:off x="2081214" y="1463040"/>
+            <a:ext cx="8029266" cy="3127248"/>
+          </a:xfrm>
+          <a:prstGeom prst="rect">
+            <a:avLst/>
+          </a:prstGeom>
+        </p:spPr>
+      </p:pic>
+      <p:sp>
+        <p:nvSpPr>
+          <p:cNvPr id="7" name="TextBox 6"/>
+          <p:cNvSpPr txBox="1"/>
+          <p:nvPr/>
+        </p:nvSpPr>
+        <p:spPr>
+          <a:xfrm>
+            <a:off x="566928" y="4663440"/>
+            <a:ext cx="11057839" cy="256032"/>
+          </a:xfrm>
+          <a:prstGeom prst="rect">
+            <a:avLst/>
+          </a:prstGeom>
+          <a:noFill/>
+        </p:spPr>
+        <p:txBody>
+          <a:bodyPr wrap="square" lIns="0" rIns="0" tIns="0" bIns="0">
+            <a:spAutoFit/>
+          </a:bodyPr>
+          <a:lstStyle/>
+          <a:p>
+            <a:pPr algn="ctr"/>
+            <a:r>
+              <a:rPr sz="1000" b="0">
+                <a:solidFill>
+                  <a:srgbClr val="5B6470"/>
+                </a:solidFill>
+                <a:latin typeface="STHeiti"/>
+              </a:rPr>
+              <a:t>论文 TABLE I：各 tier 的攻击效果（3 种子，每格 n = 180）</a:t>
+            </a:r>
+          </a:p>
+        </p:txBody>
+      </p:sp>
+      <p:sp>
+        <p:nvSpPr>
+          <p:cNvPr id="8" name="Rounded Rectangle 7"/>
           <p:cNvSpPr/>
           <p:nvPr/>
         </p:nvSpPr>
         <p:spPr>
           <a:xfrm>
-            <a:off x="566928" y="3328416"/>
-            <a:ext cx="3551834" cy="932688"/>
+            <a:off x="566928" y="5120640"/>
+            <a:ext cx="3551834" cy="841248"/>
           </a:xfrm>
           <a:prstGeom prst="roundRect">
             <a:avLst>
@@ -9334,14 +8555,14 @@
       </p:sp>
       <p:sp>
         <p:nvSpPr>
-          <p:cNvPr id="8" name="TextBox 7"/>
-          <p:cNvSpPr txBox="1"/>
-          <p:nvPr/>
-        </p:nvSpPr>
-        <p:spPr>
-          <a:xfrm>
-            <a:off x="640080" y="3410712"/>
-            <a:ext cx="3405530" cy="768096"/>
+          <p:cNvPr id="9" name="TextBox 8"/>
+          <p:cNvSpPr txBox="1"/>
+          <p:nvPr/>
+        </p:nvSpPr>
+        <p:spPr>
+          <a:xfrm>
+            <a:off x="640080" y="5202936"/>
+            <a:ext cx="3405530" cy="676656"/>
           </a:xfrm>
           <a:prstGeom prst="rect">
             <a:avLst/>
@@ -9356,7 +8577,7 @@
           <a:p>
             <a:pPr algn="ctr"/>
             <a:r>
-              <a:rPr sz="1700" b="1">
+              <a:rPr sz="1500" b="1">
                 <a:solidFill>
                   <a:srgbClr val="B3261E"/>
                 </a:solidFill>
@@ -9381,14 +8602,14 @@
       </p:sp>
       <p:sp>
         <p:nvSpPr>
-          <p:cNvPr id="9" name="Rounded Rectangle 8"/>
+          <p:cNvPr id="10" name="Rounded Rectangle 9"/>
           <p:cNvSpPr/>
           <p:nvPr/>
         </p:nvSpPr>
         <p:spPr>
           <a:xfrm>
-            <a:off x="4319930" y="3328416"/>
-            <a:ext cx="3551834" cy="932688"/>
+            <a:off x="4319930" y="5120640"/>
+            <a:ext cx="3551834" cy="841248"/>
           </a:xfrm>
           <a:prstGeom prst="roundRect">
             <a:avLst>
@@ -9429,14 +8650,14 @@
       </p:sp>
       <p:sp>
         <p:nvSpPr>
-          <p:cNvPr id="10" name="TextBox 9"/>
-          <p:cNvSpPr txBox="1"/>
-          <p:nvPr/>
-        </p:nvSpPr>
-        <p:spPr>
-          <a:xfrm>
-            <a:off x="4393082" y="3410712"/>
-            <a:ext cx="3405530" cy="768096"/>
+          <p:cNvPr id="11" name="TextBox 10"/>
+          <p:cNvSpPr txBox="1"/>
+          <p:nvPr/>
+        </p:nvSpPr>
+        <p:spPr>
+          <a:xfrm>
+            <a:off x="4393082" y="5202936"/>
+            <a:ext cx="3405530" cy="676656"/>
           </a:xfrm>
           <a:prstGeom prst="rect">
             <a:avLst/>
@@ -9451,7 +8672,7 @@
           <a:p>
             <a:pPr algn="ctr"/>
             <a:r>
-              <a:rPr sz="1700" b="1">
+              <a:rPr sz="1500" b="1">
                 <a:solidFill>
                   <a:srgbClr val="1F6FB2"/>
                 </a:solidFill>
@@ -9476,14 +8697,14 @@
       </p:sp>
       <p:sp>
         <p:nvSpPr>
-          <p:cNvPr id="11" name="Rounded Rectangle 10"/>
+          <p:cNvPr id="12" name="Rounded Rectangle 11"/>
           <p:cNvSpPr/>
           <p:nvPr/>
         </p:nvSpPr>
         <p:spPr>
           <a:xfrm>
-            <a:off x="8072932" y="3328416"/>
-            <a:ext cx="3551834" cy="932688"/>
+            <a:off x="8072932" y="5120640"/>
+            <a:ext cx="3551834" cy="841248"/>
           </a:xfrm>
           <a:prstGeom prst="roundRect">
             <a:avLst>
@@ -9524,14 +8745,14 @@
       </p:sp>
       <p:sp>
         <p:nvSpPr>
-          <p:cNvPr id="12" name="TextBox 11"/>
-          <p:cNvSpPr txBox="1"/>
-          <p:nvPr/>
-        </p:nvSpPr>
-        <p:spPr>
-          <a:xfrm>
-            <a:off x="8146084" y="3410712"/>
-            <a:ext cx="3405530" cy="768096"/>
+          <p:cNvPr id="13" name="TextBox 12"/>
+          <p:cNvSpPr txBox="1"/>
+          <p:nvPr/>
+        </p:nvSpPr>
+        <p:spPr>
+          <a:xfrm>
+            <a:off x="8146084" y="5202936"/>
+            <a:ext cx="3405530" cy="676656"/>
           </a:xfrm>
           <a:prstGeom prst="rect">
             <a:avLst/>
@@ -9546,7 +8767,7 @@
           <a:p>
             <a:pPr algn="ctr"/>
             <a:r>
-              <a:rPr sz="1700" b="1">
+              <a:rPr sz="1500" b="1">
                 <a:solidFill>
                   <a:srgbClr val="5B6470"/>
                 </a:solidFill>
@@ -9571,14 +8792,14 @@
       </p:sp>
       <p:sp>
         <p:nvSpPr>
-          <p:cNvPr id="13" name="TextBox 12"/>
-          <p:cNvSpPr txBox="1"/>
-          <p:nvPr/>
-        </p:nvSpPr>
-        <p:spPr>
-          <a:xfrm>
-            <a:off x="566928" y="4443984"/>
-            <a:ext cx="11057839" cy="350139"/>
+          <p:cNvPr id="14" name="TextBox 13"/>
+          <p:cNvSpPr txBox="1"/>
+          <p:nvPr/>
+        </p:nvSpPr>
+        <p:spPr>
+          <a:xfrm>
+            <a:off x="566928" y="6108192"/>
+            <a:ext cx="11057839" cy="329184"/>
           </a:xfrm>
           <a:prstGeom prst="rect">
             <a:avLst/>
@@ -9593,11 +8814,11 @@
           <a:p>
             <a:pPr>
               <a:spcAft>
-                <a:spcPts val="700"/>
+                <a:spcPts val="600"/>
               </a:spcAft>
             </a:pPr>
             <a:r>
-              <a:rPr sz="1250" b="0">
+              <a:rPr sz="1200" b="0">
                 <a:solidFill>
                   <a:srgbClr val="0E8F82"/>
                 </a:solidFill>
@@ -9606,7 +8827,7 @@
               <a:t>· </a:t>
             </a:r>
             <a:r>
-              <a:rPr sz="1250" b="1">
+              <a:rPr sz="1200" b="1">
                 <a:solidFill>
                   <a:srgbClr val="22272E"/>
                 </a:solidFill>
@@ -10888,180 +10109,75 @@
           </a:p>
         </p:txBody>
       </p:sp>
-      <p:graphicFrame>
-        <p:nvGraphicFramePr>
-          <p:cNvPr id="6" name="Table 5"/>
-          <p:cNvGraphicFramePr>
-            <a:graphicFrameLocks noGrp="1"/>
-          </p:cNvGraphicFramePr>
-          <p:nvPr/>
-        </p:nvGraphicFramePr>
-        <p:xfrm>
-          <a:off x="566928" y="1463040"/>
-          <a:ext cx="11057838" cy="987552"/>
-        </p:xfrm>
-        <a:graphic>
-          <a:graphicData uri="http://schemas.openxmlformats.org/drawingml/2006/table">
-            <a:tbl>
-              <a:tblPr firstRow="1">
-                <a:tableStyleId>{5C22544A-7EE6-4342-B048-85BDC9FD1C3A}</a:tableStyleId>
-              </a:tblPr>
-              <a:tblGrid>
-                <a:gridCol w="5160324"/>
-                <a:gridCol w="5897514"/>
-              </a:tblGrid>
-              <a:tr h="329184">
-                <a:tc>
-                  <a:txBody>
-                    <a:bodyPr/>
-                    <a:lstStyle/>
-                    <a:p>
-                      <a:r>
-                        <a:rPr sz="1200" b="1">
-                          <a:solidFill>
-                            <a:srgbClr val="FFFFFF"/>
-                          </a:solidFill>
-                          <a:latin typeface="STHeiti"/>
-                        </a:rPr>
-                        <a:t>配置</a:t>
-                      </a:r>
-                    </a:p>
-                  </a:txBody>
-                  <a:tcPr marL="64008" marR="45720" marT="13716" marB="13716" anchor="ctr">
-                    <a:solidFill>
-                      <a:srgbClr val="0F2A4A"/>
-                    </a:solidFill>
-                  </a:tcPr>
-                </a:tc>
-                <a:tc>
-                  <a:txBody>
-                    <a:bodyPr/>
-                    <a:lstStyle/>
-                    <a:p>
-                      <a:r>
-                        <a:rPr sz="1200" b="1">
-                          <a:solidFill>
-                            <a:srgbClr val="FFFFFF"/>
-                          </a:solidFill>
-                          <a:latin typeface="STHeiti"/>
-                        </a:rPr>
-                        <a:t>任务完成率</a:t>
-                      </a:r>
-                    </a:p>
-                  </a:txBody>
-                  <a:tcPr marL="64008" marR="45720" marT="13716" marB="13716" anchor="ctr">
-                    <a:solidFill>
-                      <a:srgbClr val="0F2A4A"/>
-                    </a:solidFill>
-                  </a:tcPr>
-                </a:tc>
-              </a:tr>
-              <a:tr h="329184">
-                <a:tc>
-                  <a:txBody>
-                    <a:bodyPr/>
-                    <a:lstStyle/>
-                    <a:p>
-                      <a:r>
-                        <a:rPr sz="1250" b="0">
-                          <a:solidFill>
-                            <a:srgbClr val="22272E"/>
-                          </a:solidFill>
-                          <a:latin typeface="STHeiti"/>
-                        </a:rPr>
-                        <a:t>无防御系统</a:t>
-                      </a:r>
-                    </a:p>
-                  </a:txBody>
-                  <a:tcPr marL="64008" marR="45720" marT="13716" marB="13716" anchor="ctr">
-                    <a:solidFill>
-                      <a:srgbClr val="FFFFFF"/>
-                    </a:solidFill>
-                  </a:tcPr>
-                </a:tc>
-                <a:tc>
-                  <a:txBody>
-                    <a:bodyPr/>
-                    <a:lstStyle/>
-                    <a:p>
-                      <a:r>
-                        <a:rPr sz="1250" b="0">
-                          <a:solidFill>
-                            <a:srgbClr val="22272E"/>
-                          </a:solidFill>
-                          <a:latin typeface="STHeiti"/>
-                        </a:rPr>
-                        <a:t>84%</a:t>
-                      </a:r>
-                    </a:p>
-                  </a:txBody>
-                  <a:tcPr marL="64008" marR="45720" marT="13716" marB="13716" anchor="ctr">
-                    <a:solidFill>
-                      <a:srgbClr val="FFFFFF"/>
-                    </a:solidFill>
-                  </a:tcPr>
-                </a:tc>
-              </a:tr>
-              <a:tr h="329184">
-                <a:tc>
-                  <a:txBody>
-                    <a:bodyPr/>
-                    <a:lstStyle/>
-                    <a:p>
-                      <a:r>
-                        <a:rPr sz="1250" b="1">
-                          <a:solidFill>
-                            <a:srgbClr val="22272E"/>
-                          </a:solidFill>
-                          <a:latin typeface="STHeiti"/>
-                        </a:rPr>
-                        <a:t>CaMeL</a:t>
-                      </a:r>
-                    </a:p>
-                  </a:txBody>
-                  <a:tcPr marL="64008" marR="45720" marT="13716" marB="13716" anchor="ctr">
-                    <a:solidFill>
-                      <a:srgbClr val="F3F5F8"/>
-                    </a:solidFill>
-                  </a:tcPr>
-                </a:tc>
-                <a:tc>
-                  <a:txBody>
-                    <a:bodyPr/>
-                    <a:lstStyle/>
-                    <a:p>
-                      <a:r>
-                        <a:rPr sz="1250" b="1">
-                          <a:solidFill>
-                            <a:srgbClr val="22272E"/>
-                          </a:solidFill>
-                          <a:latin typeface="STHeiti"/>
-                        </a:rPr>
-                        <a:t>67%**（且带可证明的安全性）</a:t>
-                      </a:r>
-                    </a:p>
-                  </a:txBody>
-                  <a:tcPr marL="64008" marR="45720" marT="13716" marB="13716" anchor="ctr">
-                    <a:solidFill>
-                      <a:srgbClr val="F3F5F8"/>
-                    </a:solidFill>
-                  </a:tcPr>
-                </a:tc>
-              </a:tr>
-            </a:tbl>
-          </a:graphicData>
-        </a:graphic>
-      </p:graphicFrame>
-      <p:sp>
-        <p:nvSpPr>
-          <p:cNvPr id="7" name="Rounded Rectangle 6"/>
+      <p:pic>
+        <p:nvPicPr>
+          <p:cNvPr id="6" name="Picture 5" descr="f1-camel-perf.png"/>
+          <p:cNvPicPr>
+            <a:picLocks noChangeAspect="1"/>
+          </p:cNvPicPr>
+          <p:nvPr/>
+        </p:nvPicPr>
+        <p:blipFill>
+          <a:blip r:embed="rId2"/>
+          <a:stretch>
+            <a:fillRect/>
+          </a:stretch>
+        </p:blipFill>
+        <p:spPr>
+          <a:xfrm>
+            <a:off x="2546327" y="1463040"/>
+            <a:ext cx="7099041" cy="3127248"/>
+          </a:xfrm>
+          <a:prstGeom prst="rect">
+            <a:avLst/>
+          </a:prstGeom>
+        </p:spPr>
+      </p:pic>
+      <p:sp>
+        <p:nvSpPr>
+          <p:cNvPr id="7" name="TextBox 6"/>
+          <p:cNvSpPr txBox="1"/>
+          <p:nvPr/>
+        </p:nvSpPr>
+        <p:spPr>
+          <a:xfrm>
+            <a:off x="566928" y="4663440"/>
+            <a:ext cx="11057839" cy="256032"/>
+          </a:xfrm>
+          <a:prstGeom prst="rect">
+            <a:avLst/>
+          </a:prstGeom>
+          <a:noFill/>
+        </p:spPr>
+        <p:txBody>
+          <a:bodyPr wrap="square" lIns="0" rIns="0" tIns="0" bIns="0">
+            <a:spAutoFit/>
+          </a:bodyPr>
+          <a:lstStyle/>
+          <a:p>
+            <a:pPr algn="ctr"/>
+            <a:r>
+              <a:rPr sz="1000" b="0">
+                <a:solidFill>
+                  <a:srgbClr val="5B6470"/>
+                </a:solidFill>
+                <a:latin typeface="STHeiti"/>
+              </a:rPr>
+              <a:t>论文 Figure 8：各模型在 AgentDojo 上的可用性（CaMeL vs 原生工具调用）</a:t>
+            </a:r>
+          </a:p>
+        </p:txBody>
+      </p:sp>
+      <p:sp>
+        <p:nvSpPr>
+          <p:cNvPr id="8" name="Rounded Rectangle 7"/>
           <p:cNvSpPr/>
           <p:nvPr/>
         </p:nvSpPr>
         <p:spPr>
           <a:xfrm>
-            <a:off x="566928" y="2670048"/>
-            <a:ext cx="3551834" cy="932688"/>
+            <a:off x="566928" y="5120640"/>
+            <a:ext cx="3551834" cy="841248"/>
           </a:xfrm>
           <a:prstGeom prst="roundRect">
             <a:avLst>
@@ -11102,14 +10218,14 @@
       </p:sp>
       <p:sp>
         <p:nvSpPr>
-          <p:cNvPr id="8" name="TextBox 7"/>
-          <p:cNvSpPr txBox="1"/>
-          <p:nvPr/>
-        </p:nvSpPr>
-        <p:spPr>
-          <a:xfrm>
-            <a:off x="640080" y="2752344"/>
-            <a:ext cx="3405530" cy="768096"/>
+          <p:cNvPr id="9" name="TextBox 8"/>
+          <p:cNvSpPr txBox="1"/>
+          <p:nvPr/>
+        </p:nvSpPr>
+        <p:spPr>
+          <a:xfrm>
+            <a:off x="640080" y="5202936"/>
+            <a:ext cx="3405530" cy="676656"/>
           </a:xfrm>
           <a:prstGeom prst="rect">
             <a:avLst/>
@@ -11124,7 +10240,7 @@
           <a:p>
             <a:pPr algn="ctr"/>
             <a:r>
-              <a:rPr sz="1700" b="1">
+              <a:rPr sz="1500" b="1">
                 <a:solidFill>
                   <a:srgbClr val="1F6FB2"/>
                 </a:solidFill>
@@ -11149,14 +10265,14 @@
       </p:sp>
       <p:sp>
         <p:nvSpPr>
-          <p:cNvPr id="9" name="Rounded Rectangle 8"/>
+          <p:cNvPr id="10" name="Rounded Rectangle 9"/>
           <p:cNvSpPr/>
           <p:nvPr/>
         </p:nvSpPr>
         <p:spPr>
           <a:xfrm>
-            <a:off x="4319930" y="2670048"/>
-            <a:ext cx="3551834" cy="932688"/>
+            <a:off x="4319930" y="5120640"/>
+            <a:ext cx="3551834" cy="841248"/>
           </a:xfrm>
           <a:prstGeom prst="roundRect">
             <a:avLst>
@@ -11197,14 +10313,14 @@
       </p:sp>
       <p:sp>
         <p:nvSpPr>
-          <p:cNvPr id="10" name="TextBox 9"/>
-          <p:cNvSpPr txBox="1"/>
-          <p:nvPr/>
-        </p:nvSpPr>
-        <p:spPr>
-          <a:xfrm>
-            <a:off x="4393082" y="2752344"/>
-            <a:ext cx="3405530" cy="768096"/>
+          <p:cNvPr id="11" name="TextBox 10"/>
+          <p:cNvSpPr txBox="1"/>
+          <p:nvPr/>
+        </p:nvSpPr>
+        <p:spPr>
+          <a:xfrm>
+            <a:off x="4393082" y="5202936"/>
+            <a:ext cx="3405530" cy="676656"/>
           </a:xfrm>
           <a:prstGeom prst="rect">
             <a:avLst/>
@@ -11219,7 +10335,7 @@
           <a:p>
             <a:pPr algn="ctr"/>
             <a:r>
-              <a:rPr sz="1700" b="1">
+              <a:rPr sz="1500" b="1">
                 <a:solidFill>
                   <a:srgbClr val="C86A00"/>
                 </a:solidFill>
@@ -11244,14 +10360,14 @@
       </p:sp>
       <p:sp>
         <p:nvSpPr>
-          <p:cNvPr id="11" name="Rounded Rectangle 10"/>
+          <p:cNvPr id="12" name="Rounded Rectangle 11"/>
           <p:cNvSpPr/>
           <p:nvPr/>
         </p:nvSpPr>
         <p:spPr>
           <a:xfrm>
-            <a:off x="8072932" y="2670048"/>
-            <a:ext cx="3551834" cy="932688"/>
+            <a:off x="8072932" y="5120640"/>
+            <a:ext cx="3551834" cy="841248"/>
           </a:xfrm>
           <a:prstGeom prst="roundRect">
             <a:avLst>
@@ -11292,14 +10408,14 @@
       </p:sp>
       <p:sp>
         <p:nvSpPr>
-          <p:cNvPr id="12" name="TextBox 11"/>
-          <p:cNvSpPr txBox="1"/>
-          <p:nvPr/>
-        </p:nvSpPr>
-        <p:spPr>
-          <a:xfrm>
-            <a:off x="8146084" y="2752344"/>
-            <a:ext cx="3405530" cy="768096"/>
+          <p:cNvPr id="13" name="TextBox 12"/>
+          <p:cNvSpPr txBox="1"/>
+          <p:nvPr/>
+        </p:nvSpPr>
+        <p:spPr>
+          <a:xfrm>
+            <a:off x="8146084" y="5202936"/>
+            <a:ext cx="3405530" cy="676656"/>
           </a:xfrm>
           <a:prstGeom prst="rect">
             <a:avLst/>
@@ -11314,7 +10430,7 @@
           <a:p>
             <a:pPr algn="ctr"/>
             <a:r>
-              <a:rPr sz="1700" b="1">
+              <a:rPr sz="1500" b="1">
                 <a:solidFill>
                   <a:srgbClr val="B3261E"/>
                 </a:solidFill>
@@ -11339,14 +10455,14 @@
       </p:sp>
       <p:sp>
         <p:nvSpPr>
-          <p:cNvPr id="13" name="TextBox 12"/>
-          <p:cNvSpPr txBox="1"/>
-          <p:nvPr/>
-        </p:nvSpPr>
-        <p:spPr>
-          <a:xfrm>
-            <a:off x="566928" y="3785616"/>
-            <a:ext cx="11057839" cy="350139"/>
+          <p:cNvPr id="14" name="TextBox 13"/>
+          <p:cNvSpPr txBox="1"/>
+          <p:nvPr/>
+        </p:nvSpPr>
+        <p:spPr>
+          <a:xfrm>
+            <a:off x="566928" y="6108192"/>
+            <a:ext cx="11057839" cy="329184"/>
           </a:xfrm>
           <a:prstGeom prst="rect">
             <a:avLst/>
@@ -11361,11 +10477,11 @@
           <a:p>
             <a:pPr>
               <a:spcAft>
-                <a:spcPts val="700"/>
+                <a:spcPts val="600"/>
               </a:spcAft>
             </a:pPr>
             <a:r>
-              <a:rPr sz="1250" b="0">
+              <a:rPr sz="1200" b="0">
                 <a:solidFill>
                   <a:srgbClr val="0E8F82"/>
                 </a:solidFill>
@@ -11374,7 +10490,7 @@
               <a:t>· </a:t>
             </a:r>
             <a:r>
-              <a:rPr sz="1250" b="1">
+              <a:rPr sz="1200" b="1">
                 <a:solidFill>
                   <a:srgbClr val="22272E"/>
                 </a:solidFill>
@@ -12707,383 +11823,75 @@
           </a:p>
         </p:txBody>
       </p:sp>
-      <p:graphicFrame>
-        <p:nvGraphicFramePr>
-          <p:cNvPr id="6" name="Table 5"/>
-          <p:cNvGraphicFramePr>
-            <a:graphicFrameLocks noGrp="1"/>
-          </p:cNvGraphicFramePr>
-          <p:nvPr/>
-        </p:nvGraphicFramePr>
-        <p:xfrm>
-          <a:off x="566928" y="1463040"/>
-          <a:ext cx="11057838" cy="1645920"/>
-        </p:xfrm>
-        <a:graphic>
-          <a:graphicData uri="http://schemas.openxmlformats.org/drawingml/2006/table">
-            <a:tbl>
-              <a:tblPr firstRow="1">
-                <a:tableStyleId>{5C22544A-7EE6-4342-B048-85BDC9FD1C3A}</a:tableStyleId>
-              </a:tblPr>
-              <a:tblGrid>
-                <a:gridCol w="4146689"/>
-                <a:gridCol w="3225203"/>
-                <a:gridCol w="3685946"/>
-              </a:tblGrid>
-              <a:tr h="329184">
-                <a:tc>
-                  <a:txBody>
-                    <a:bodyPr/>
-                    <a:lstStyle/>
-                    <a:p>
-                      <a:r>
-                        <a:rPr sz="1200" b="1">
-                          <a:solidFill>
-                            <a:srgbClr val="FFFFFF"/>
-                          </a:solidFill>
-                          <a:latin typeface="STHeiti"/>
-                        </a:rPr>
-                        <a:t>模式</a:t>
-                      </a:r>
-                    </a:p>
-                  </a:txBody>
-                  <a:tcPr marL="64008" marR="45720" marT="13716" marB="13716" anchor="ctr">
-                    <a:solidFill>
-                      <a:srgbClr val="0F2A4A"/>
-                    </a:solidFill>
-                  </a:tcPr>
-                </a:tc>
-                <a:tc>
-                  <a:txBody>
-                    <a:bodyPr/>
-                    <a:lstStyle/>
-                    <a:p>
-                      <a:r>
-                        <a:rPr sz="1200" b="1">
-                          <a:solidFill>
-                            <a:srgbClr val="FFFFFF"/>
-                          </a:solidFill>
-                          <a:latin typeface="STHeiti"/>
-                        </a:rPr>
-                        <a:t>只防「改动作」</a:t>
-                      </a:r>
-                    </a:p>
-                  </a:txBody>
-                  <a:tcPr marL="64008" marR="45720" marT="13716" marB="13716" anchor="ctr">
-                    <a:solidFill>
-                      <a:srgbClr val="0F2A4A"/>
-                    </a:solidFill>
-                  </a:tcPr>
-                </a:tc>
-                <a:tc>
-                  <a:txBody>
-                    <a:bodyPr/>
-                    <a:lstStyle/>
-                    <a:p>
-                      <a:r>
-                        <a:rPr sz="1200" b="1">
-                          <a:solidFill>
-                            <a:srgbClr val="FFFFFF"/>
-                          </a:solidFill>
-                          <a:latin typeface="STHeiti"/>
-                        </a:rPr>
-                        <a:t>也防「改参数」</a:t>
-                      </a:r>
-                    </a:p>
-                  </a:txBody>
-                  <a:tcPr marL="64008" marR="45720" marT="13716" marB="13716" anchor="ctr">
-                    <a:solidFill>
-                      <a:srgbClr val="0F2A4A"/>
-                    </a:solidFill>
-                  </a:tcPr>
-                </a:tc>
-              </a:tr>
-              <a:tr h="329184">
-                <a:tc>
-                  <a:txBody>
-                    <a:bodyPr/>
-                    <a:lstStyle/>
-                    <a:p>
-                      <a:r>
-                        <a:rPr sz="1250" b="0">
-                          <a:solidFill>
-                            <a:srgbClr val="22272E"/>
-                          </a:solidFill>
-                          <a:latin typeface="STHeiti"/>
-                        </a:rPr>
-                        <a:t>Action-Selector</a:t>
-                      </a:r>
-                    </a:p>
-                  </a:txBody>
-                  <a:tcPr marL="64008" marR="45720" marT="13716" marB="13716" anchor="ctr">
-                    <a:solidFill>
-                      <a:srgbClr val="FFFFFF"/>
-                    </a:solidFill>
-                  </a:tcPr>
-                </a:tc>
-                <a:tc>
-                  <a:txBody>
-                    <a:bodyPr/>
-                    <a:lstStyle/>
-                    <a:p>
-                      <a:r>
-                        <a:rPr sz="1250" b="0">
-                          <a:solidFill>
-                            <a:srgbClr val="22272E"/>
-                          </a:solidFill>
-                          <a:latin typeface="STHeiti"/>
-                        </a:rPr>
-                        <a:t>是（切断回流）</a:t>
-                      </a:r>
-                    </a:p>
-                  </a:txBody>
-                  <a:tcPr marL="64008" marR="45720" marT="13716" marB="13716" anchor="ctr">
-                    <a:solidFill>
-                      <a:srgbClr val="FFFFFF"/>
-                    </a:solidFill>
-                  </a:tcPr>
-                </a:tc>
-                <a:tc>
-                  <a:txBody>
-                    <a:bodyPr/>
-                    <a:lstStyle/>
-                    <a:p>
-                      <a:r>
-                        <a:rPr sz="1250" b="0">
-                          <a:solidFill>
-                            <a:srgbClr val="22272E"/>
-                          </a:solidFill>
-                          <a:latin typeface="STHeiti"/>
-                        </a:rPr>
-                        <a:t>—</a:t>
-                      </a:r>
-                    </a:p>
-                  </a:txBody>
-                  <a:tcPr marL="64008" marR="45720" marT="13716" marB="13716" anchor="ctr">
-                    <a:solidFill>
-                      <a:srgbClr val="FFFFFF"/>
-                    </a:solidFill>
-                  </a:tcPr>
-                </a:tc>
-              </a:tr>
-              <a:tr h="329184">
-                <a:tc>
-                  <a:txBody>
-                    <a:bodyPr/>
-                    <a:lstStyle/>
-                    <a:p>
-                      <a:r>
-                        <a:rPr sz="1250" b="0">
-                          <a:solidFill>
-                            <a:srgbClr val="22272E"/>
-                          </a:solidFill>
-                          <a:latin typeface="STHeiti"/>
-                        </a:rPr>
-                        <a:t>Plan-Then-Execute</a:t>
-                      </a:r>
-                    </a:p>
-                  </a:txBody>
-                  <a:tcPr marL="64008" marR="45720" marT="13716" marB="13716" anchor="ctr">
-                    <a:solidFill>
-                      <a:srgbClr val="F3F5F8"/>
-                    </a:solidFill>
-                  </a:tcPr>
-                </a:tc>
-                <a:tc>
-                  <a:txBody>
-                    <a:bodyPr/>
-                    <a:lstStyle/>
-                    <a:p>
-                      <a:r>
-                        <a:rPr sz="1250" b="0">
-                          <a:solidFill>
-                            <a:srgbClr val="22272E"/>
-                          </a:solidFill>
-                          <a:latin typeface="STHeiti"/>
-                        </a:rPr>
-                        <a:t>是</a:t>
-                      </a:r>
-                    </a:p>
-                  </a:txBody>
-                  <a:tcPr marL="64008" marR="45720" marT="13716" marB="13716" anchor="ctr">
-                    <a:solidFill>
-                      <a:srgbClr val="F3F5F8"/>
-                    </a:solidFill>
-                  </a:tcPr>
-                </a:tc>
-                <a:tc>
-                  <a:txBody>
-                    <a:bodyPr/>
-                    <a:lstStyle/>
-                    <a:p>
-                      <a:r>
-                        <a:rPr sz="1250" b="1">
-                          <a:solidFill>
-                            <a:srgbClr val="22272E"/>
-                          </a:solidFill>
-                          <a:latin typeface="STHeiti"/>
-                        </a:rPr>
-                        <a:t>否</a:t>
-                      </a:r>
-                    </a:p>
-                  </a:txBody>
-                  <a:tcPr marL="64008" marR="45720" marT="13716" marB="13716" anchor="ctr">
-                    <a:solidFill>
-                      <a:srgbClr val="F3F5F8"/>
-                    </a:solidFill>
-                  </a:tcPr>
-                </a:tc>
-              </a:tr>
-              <a:tr h="329184">
-                <a:tc>
-                  <a:txBody>
-                    <a:bodyPr/>
-                    <a:lstStyle/>
-                    <a:p>
-                      <a:r>
-                        <a:rPr sz="1250" b="0">
-                          <a:solidFill>
-                            <a:srgbClr val="22272E"/>
-                          </a:solidFill>
-                          <a:latin typeface="STHeiti"/>
-                        </a:rPr>
-                        <a:t>Code-Then-Execute</a:t>
-                      </a:r>
-                    </a:p>
-                  </a:txBody>
-                  <a:tcPr marL="64008" marR="45720" marT="13716" marB="13716" anchor="ctr">
-                    <a:solidFill>
-                      <a:srgbClr val="FFFFFF"/>
-                    </a:solidFill>
-                  </a:tcPr>
-                </a:tc>
-                <a:tc>
-                  <a:txBody>
-                    <a:bodyPr/>
-                    <a:lstStyle/>
-                    <a:p>
-                      <a:r>
-                        <a:rPr sz="1250" b="0">
-                          <a:solidFill>
-                            <a:srgbClr val="22272E"/>
-                          </a:solidFill>
-                          <a:latin typeface="STHeiti"/>
-                        </a:rPr>
-                        <a:t>是</a:t>
-                      </a:r>
-                    </a:p>
-                  </a:txBody>
-                  <a:tcPr marL="64008" marR="45720" marT="13716" marB="13716" anchor="ctr">
-                    <a:solidFill>
-                      <a:srgbClr val="FFFFFF"/>
-                    </a:solidFill>
-                  </a:tcPr>
-                </a:tc>
-                <a:tc>
-                  <a:txBody>
-                    <a:bodyPr/>
-                    <a:lstStyle/>
-                    <a:p>
-                      <a:r>
-                        <a:rPr sz="1250" b="1">
-                          <a:solidFill>
-                            <a:srgbClr val="22272E"/>
-                          </a:solidFill>
-                          <a:latin typeface="STHeiti"/>
-                        </a:rPr>
-                        <a:t>否</a:t>
-                      </a:r>
-                    </a:p>
-                  </a:txBody>
-                  <a:tcPr marL="64008" marR="45720" marT="13716" marB="13716" anchor="ctr">
-                    <a:solidFill>
-                      <a:srgbClr val="FFFFFF"/>
-                    </a:solidFill>
-                  </a:tcPr>
-                </a:tc>
-              </a:tr>
-              <a:tr h="329184">
-                <a:tc>
-                  <a:txBody>
-                    <a:bodyPr/>
-                    <a:lstStyle/>
-                    <a:p>
-                      <a:r>
-                        <a:rPr sz="1250" b="0">
-                          <a:solidFill>
-                            <a:srgbClr val="22272E"/>
-                          </a:solidFill>
-                          <a:latin typeface="STHeiti"/>
-                        </a:rPr>
-                        <a:t>Dual LLM / CaMeL</a:t>
-                      </a:r>
-                    </a:p>
-                  </a:txBody>
-                  <a:tcPr marL="64008" marR="45720" marT="13716" marB="13716" anchor="ctr">
-                    <a:solidFill>
-                      <a:srgbClr val="F3F5F8"/>
-                    </a:solidFill>
-                  </a:tcPr>
-                </a:tc>
-                <a:tc>
-                  <a:txBody>
-                    <a:bodyPr/>
-                    <a:lstStyle/>
-                    <a:p>
-                      <a:r>
-                        <a:rPr sz="1250" b="0">
-                          <a:solidFill>
-                            <a:srgbClr val="22272E"/>
-                          </a:solidFill>
-                          <a:latin typeface="STHeiti"/>
-                        </a:rPr>
-                        <a:t>是</a:t>
-                      </a:r>
-                    </a:p>
-                  </a:txBody>
-                  <a:tcPr marL="64008" marR="45720" marT="13716" marB="13716" anchor="ctr">
-                    <a:solidFill>
-                      <a:srgbClr val="F3F5F8"/>
-                    </a:solidFill>
-                  </a:tcPr>
-                </a:tc>
-                <a:tc>
-                  <a:txBody>
-                    <a:bodyPr/>
-                    <a:lstStyle/>
-                    <a:p>
-                      <a:r>
-                        <a:rPr sz="1250" b="0">
-                          <a:solidFill>
-                            <a:srgbClr val="22272E"/>
-                          </a:solidFill>
-                          <a:latin typeface="STHeiti"/>
-                        </a:rPr>
-                        <a:t>是（capability）</a:t>
-                      </a:r>
-                    </a:p>
-                  </a:txBody>
-                  <a:tcPr marL="64008" marR="45720" marT="13716" marB="13716" anchor="ctr">
-                    <a:solidFill>
-                      <a:srgbClr val="F3F5F8"/>
-                    </a:solidFill>
-                  </a:tcPr>
-                </a:tc>
-              </a:tr>
-            </a:tbl>
-          </a:graphicData>
-        </a:graphic>
-      </p:graphicFrame>
-      <p:sp>
-        <p:nvSpPr>
-          <p:cNvPr id="7" name="Rounded Rectangle 6"/>
+      <p:pic>
+        <p:nvPicPr>
+          <p:cNvPr id="6" name="Picture 5" descr="t6-b2-cases.png"/>
+          <p:cNvPicPr>
+            <a:picLocks noChangeAspect="1"/>
+          </p:cNvPicPr>
+          <p:nvPr/>
+        </p:nvPicPr>
+        <p:blipFill>
+          <a:blip r:embed="rId2"/>
+          <a:stretch>
+            <a:fillRect/>
+          </a:stretch>
+        </p:blipFill>
+        <p:spPr>
+          <a:xfrm>
+            <a:off x="566928" y="1463040"/>
+            <a:ext cx="6413546" cy="3542641"/>
+          </a:xfrm>
+          <a:prstGeom prst="rect">
+            <a:avLst/>
+          </a:prstGeom>
+        </p:spPr>
+      </p:pic>
+      <p:sp>
+        <p:nvSpPr>
+          <p:cNvPr id="7" name="TextBox 6"/>
+          <p:cNvSpPr txBox="1"/>
+          <p:nvPr/>
+        </p:nvSpPr>
+        <p:spPr>
+          <a:xfrm>
+            <a:off x="566928" y="5078833"/>
+            <a:ext cx="6413546" cy="256032"/>
+          </a:xfrm>
+          <a:prstGeom prst="rect">
+            <a:avLst/>
+          </a:prstGeom>
+          <a:noFill/>
+        </p:spPr>
+        <p:txBody>
+          <a:bodyPr wrap="square" lIns="0" rIns="0" tIns="0" bIns="0">
+            <a:spAutoFit/>
+          </a:bodyPr>
+          <a:lstStyle/>
+          <a:p>
+            <a:pPr algn="ctr"/>
+            <a:r>
+              <a:rPr sz="1000" b="0">
+                <a:solidFill>
+                  <a:srgbClr val="5B6470"/>
+                </a:solidFill>
+                <a:latin typeface="STHeiti"/>
+              </a:rPr>
+              <a:t>论文 Table 1：10 个案例与所用设计模式的对应</a:t>
+            </a:r>
+          </a:p>
+        </p:txBody>
+      </p:sp>
+      <p:sp>
+        <p:nvSpPr>
+          <p:cNvPr id="8" name="Rounded Rectangle 7"/>
           <p:cNvSpPr/>
           <p:nvPr/>
         </p:nvSpPr>
         <p:spPr>
           <a:xfrm>
-            <a:off x="566928" y="3328416"/>
-            <a:ext cx="3551834" cy="932688"/>
+            <a:off x="7309658" y="1463040"/>
+            <a:ext cx="4315109" cy="713232"/>
           </a:xfrm>
           <a:prstGeom prst="roundRect">
             <a:avLst>
@@ -13124,29 +11932,28 @@
       </p:sp>
       <p:sp>
         <p:nvSpPr>
-          <p:cNvPr id="8" name="TextBox 7"/>
-          <p:cNvSpPr txBox="1"/>
-          <p:nvPr/>
-        </p:nvSpPr>
-        <p:spPr>
-          <a:xfrm>
-            <a:off x="640080" y="3410712"/>
-            <a:ext cx="3405530" cy="768096"/>
-          </a:xfrm>
-          <a:prstGeom prst="rect">
-            <a:avLst/>
-          </a:prstGeom>
-          <a:noFill/>
-        </p:spPr>
-        <p:txBody>
-          <a:bodyPr wrap="square" lIns="0" rIns="0" tIns="0" bIns="0">
-            <a:spAutoFit/>
-          </a:bodyPr>
-          <a:lstStyle/>
-          <a:p>
-            <a:pPr algn="ctr"/>
-            <a:r>
-              <a:rPr sz="1700" b="1">
+          <p:cNvPr id="9" name="TextBox 8"/>
+          <p:cNvSpPr txBox="1"/>
+          <p:nvPr/>
+        </p:nvSpPr>
+        <p:spPr>
+          <a:xfrm>
+            <a:off x="7455962" y="1554480"/>
+            <a:ext cx="4022501" cy="530352"/>
+          </a:xfrm>
+          <a:prstGeom prst="rect">
+            <a:avLst/>
+          </a:prstGeom>
+          <a:noFill/>
+        </p:spPr>
+        <p:txBody>
+          <a:bodyPr wrap="square" lIns="0" rIns="0" tIns="0" bIns="0">
+            <a:spAutoFit/>
+          </a:bodyPr>
+          <a:lstStyle/>
+          <a:p>
+            <a:r>
+              <a:rPr sz="1500" b="1">
                 <a:solidFill>
                   <a:srgbClr val="1F6FB2"/>
                 </a:solidFill>
@@ -13156,7 +11963,6 @@
             </a:r>
           </a:p>
           <a:p>
-            <a:pPr algn="ctr"/>
             <a:r>
               <a:rPr sz="1050" b="0">
                 <a:solidFill>
@@ -13171,14 +11977,14 @@
       </p:sp>
       <p:sp>
         <p:nvSpPr>
-          <p:cNvPr id="9" name="Rounded Rectangle 8"/>
+          <p:cNvPr id="10" name="Rounded Rectangle 9"/>
           <p:cNvSpPr/>
           <p:nvPr/>
         </p:nvSpPr>
         <p:spPr>
           <a:xfrm>
-            <a:off x="4319930" y="3328416"/>
-            <a:ext cx="3551834" cy="932688"/>
+            <a:off x="7309658" y="2322576"/>
+            <a:ext cx="4315109" cy="713232"/>
           </a:xfrm>
           <a:prstGeom prst="roundRect">
             <a:avLst>
@@ -13219,29 +12025,28 @@
       </p:sp>
       <p:sp>
         <p:nvSpPr>
-          <p:cNvPr id="10" name="TextBox 9"/>
-          <p:cNvSpPr txBox="1"/>
-          <p:nvPr/>
-        </p:nvSpPr>
-        <p:spPr>
-          <a:xfrm>
-            <a:off x="4393082" y="3410712"/>
-            <a:ext cx="3405530" cy="768096"/>
-          </a:xfrm>
-          <a:prstGeom prst="rect">
-            <a:avLst/>
-          </a:prstGeom>
-          <a:noFill/>
-        </p:spPr>
-        <p:txBody>
-          <a:bodyPr wrap="square" lIns="0" rIns="0" tIns="0" bIns="0">
-            <a:spAutoFit/>
-          </a:bodyPr>
-          <a:lstStyle/>
-          <a:p>
-            <a:pPr algn="ctr"/>
-            <a:r>
-              <a:rPr sz="1700" b="1">
+          <p:cNvPr id="11" name="TextBox 10"/>
+          <p:cNvSpPr txBox="1"/>
+          <p:nvPr/>
+        </p:nvSpPr>
+        <p:spPr>
+          <a:xfrm>
+            <a:off x="7455962" y="2414016"/>
+            <a:ext cx="4022501" cy="530352"/>
+          </a:xfrm>
+          <a:prstGeom prst="rect">
+            <a:avLst/>
+          </a:prstGeom>
+          <a:noFill/>
+        </p:spPr>
+        <p:txBody>
+          <a:bodyPr wrap="square" lIns="0" rIns="0" tIns="0" bIns="0">
+            <a:spAutoFit/>
+          </a:bodyPr>
+          <a:lstStyle/>
+          <a:p>
+            <a:r>
+              <a:rPr sz="1500" b="1">
                 <a:solidFill>
                   <a:srgbClr val="0E8F82"/>
                 </a:solidFill>
@@ -13251,7 +12056,6 @@
             </a:r>
           </a:p>
           <a:p>
-            <a:pPr algn="ctr"/>
             <a:r>
               <a:rPr sz="1050" b="0">
                 <a:solidFill>
@@ -13266,14 +12070,14 @@
       </p:sp>
       <p:sp>
         <p:nvSpPr>
-          <p:cNvPr id="11" name="Rounded Rectangle 10"/>
+          <p:cNvPr id="12" name="Rounded Rectangle 11"/>
           <p:cNvSpPr/>
           <p:nvPr/>
         </p:nvSpPr>
         <p:spPr>
           <a:xfrm>
-            <a:off x="8072932" y="3328416"/>
-            <a:ext cx="3551834" cy="932688"/>
+            <a:off x="7309658" y="3182112"/>
+            <a:ext cx="4315109" cy="713232"/>
           </a:xfrm>
           <a:prstGeom prst="roundRect">
             <a:avLst>
@@ -13314,29 +12118,28 @@
       </p:sp>
       <p:sp>
         <p:nvSpPr>
-          <p:cNvPr id="12" name="TextBox 11"/>
-          <p:cNvSpPr txBox="1"/>
-          <p:nvPr/>
-        </p:nvSpPr>
-        <p:spPr>
-          <a:xfrm>
-            <a:off x="8146084" y="3410712"/>
-            <a:ext cx="3405530" cy="768096"/>
-          </a:xfrm>
-          <a:prstGeom prst="rect">
-            <a:avLst/>
-          </a:prstGeom>
-          <a:noFill/>
-        </p:spPr>
-        <p:txBody>
-          <a:bodyPr wrap="square" lIns="0" rIns="0" tIns="0" bIns="0">
-            <a:spAutoFit/>
-          </a:bodyPr>
-          <a:lstStyle/>
-          <a:p>
-            <a:pPr algn="ctr"/>
-            <a:r>
-              <a:rPr sz="1700" b="1">
+          <p:cNvPr id="13" name="TextBox 12"/>
+          <p:cNvSpPr txBox="1"/>
+          <p:nvPr/>
+        </p:nvSpPr>
+        <p:spPr>
+          <a:xfrm>
+            <a:off x="7455962" y="3273552"/>
+            <a:ext cx="4022501" cy="530352"/>
+          </a:xfrm>
+          <a:prstGeom prst="rect">
+            <a:avLst/>
+          </a:prstGeom>
+          <a:noFill/>
+        </p:spPr>
+        <p:txBody>
+          <a:bodyPr wrap="square" lIns="0" rIns="0" tIns="0" bIns="0">
+            <a:spAutoFit/>
+          </a:bodyPr>
+          <a:lstStyle/>
+          <a:p>
+            <a:r>
+              <a:rPr sz="1500" b="1">
                 <a:solidFill>
                   <a:srgbClr val="C86A00"/>
                 </a:solidFill>
@@ -13346,7 +12149,6 @@
             </a:r>
           </a:p>
           <a:p>
-            <a:pPr algn="ctr"/>
             <a:r>
               <a:rPr sz="1050" b="0">
                 <a:solidFill>
@@ -13361,14 +12163,14 @@
       </p:sp>
       <p:sp>
         <p:nvSpPr>
-          <p:cNvPr id="13" name="TextBox 12"/>
-          <p:cNvSpPr txBox="1"/>
-          <p:nvPr/>
-        </p:nvSpPr>
-        <p:spPr>
-          <a:xfrm>
-            <a:off x="566928" y="4443984"/>
-            <a:ext cx="11057839" cy="350139"/>
+          <p:cNvPr id="14" name="TextBox 13"/>
+          <p:cNvSpPr txBox="1"/>
+          <p:nvPr/>
+        </p:nvSpPr>
+        <p:spPr>
+          <a:xfrm>
+            <a:off x="7309658" y="4059936"/>
+            <a:ext cx="4315109" cy="738124"/>
           </a:xfrm>
           <a:prstGeom prst="rect">
             <a:avLst/>
@@ -13387,7 +12189,7 @@
               </a:spcAft>
             </a:pPr>
             <a:r>
-              <a:rPr sz="1250" b="0">
+              <a:rPr sz="1200" b="0">
                 <a:solidFill>
                   <a:srgbClr val="0E8F82"/>
                 </a:solidFill>
@@ -13396,7 +12198,7 @@
               <a:t>· </a:t>
             </a:r>
             <a:r>
-              <a:rPr sz="1250" b="1">
+              <a:rPr sz="1200" b="1">
                 <a:solidFill>
                   <a:srgbClr val="22272E"/>
                 </a:solidFill>
@@ -15346,226 +14148,75 @@
           </a:p>
         </p:txBody>
       </p:sp>
-      <p:graphicFrame>
-        <p:nvGraphicFramePr>
-          <p:cNvPr id="6" name="Table 5"/>
-          <p:cNvGraphicFramePr>
-            <a:graphicFrameLocks noGrp="1"/>
-          </p:cNvGraphicFramePr>
-          <p:nvPr/>
-        </p:nvGraphicFramePr>
-        <p:xfrm>
-          <a:off x="566928" y="1463040"/>
-          <a:ext cx="11057839" cy="1316736"/>
-        </p:xfrm>
-        <a:graphic>
-          <a:graphicData uri="http://schemas.openxmlformats.org/drawingml/2006/table">
-            <a:tbl>
-              <a:tblPr firstRow="1">
-                <a:tableStyleId>{5C22544A-7EE6-4342-B048-85BDC9FD1C3A}</a:tableStyleId>
-              </a:tblPr>
-              <a:tblGrid>
-                <a:gridCol w="6804824"/>
-                <a:gridCol w="4253015"/>
-              </a:tblGrid>
-              <a:tr h="329184">
-                <a:tc>
-                  <a:txBody>
-                    <a:bodyPr/>
-                    <a:lstStyle/>
-                    <a:p>
-                      <a:r>
-                        <a:rPr sz="1200" b="1">
-                          <a:solidFill>
-                            <a:srgbClr val="FFFFFF"/>
-                          </a:solidFill>
-                          <a:latin typeface="STHeiti"/>
-                        </a:rPr>
-                        <a:t>配置</a:t>
-                      </a:r>
-                    </a:p>
-                  </a:txBody>
-                  <a:tcPr marL="64008" marR="45720" marT="13716" marB="13716" anchor="ctr">
-                    <a:solidFill>
-                      <a:srgbClr val="0F2A4A"/>
-                    </a:solidFill>
-                  </a:tcPr>
-                </a:tc>
-                <a:tc>
-                  <a:txBody>
-                    <a:bodyPr/>
-                    <a:lstStyle/>
-                    <a:p>
-                      <a:r>
-                        <a:rPr sz="1200" b="1">
-                          <a:solidFill>
-                            <a:srgbClr val="FFFFFF"/>
-                          </a:solidFill>
-                          <a:latin typeface="STHeiti"/>
-                        </a:rPr>
-                        <a:t>攻击成功率</a:t>
-                      </a:r>
-                    </a:p>
-                  </a:txBody>
-                  <a:tcPr marL="64008" marR="45720" marT="13716" marB="13716" anchor="ctr">
-                    <a:solidFill>
-                      <a:srgbClr val="0F2A4A"/>
-                    </a:solidFill>
-                  </a:tcPr>
-                </a:tc>
-              </a:tr>
-              <a:tr h="329184">
-                <a:tc>
-                  <a:txBody>
-                    <a:bodyPr/>
-                    <a:lstStyle/>
-                    <a:p>
-                      <a:r>
-                        <a:rPr sz="1250" b="0">
-                          <a:solidFill>
-                            <a:srgbClr val="22272E"/>
-                          </a:solidFill>
-                          <a:latin typeface="STHeiti"/>
-                        </a:rPr>
-                        <a:t>PromptGuard 单用</a:t>
-                      </a:r>
-                    </a:p>
-                  </a:txBody>
-                  <a:tcPr marL="64008" marR="45720" marT="13716" marB="13716" anchor="ctr">
-                    <a:solidFill>
-                      <a:srgbClr val="FFFFFF"/>
-                    </a:solidFill>
-                  </a:tcPr>
-                </a:tc>
-                <a:tc>
-                  <a:txBody>
-                    <a:bodyPr/>
-                    <a:lstStyle/>
-                    <a:p>
-                      <a:r>
-                        <a:rPr sz="1250" b="0">
-                          <a:solidFill>
-                            <a:srgbClr val="22272E"/>
-                          </a:solidFill>
-                          <a:latin typeface="STHeiti"/>
-                        </a:rPr>
-                        <a:t>12.25%</a:t>
-                      </a:r>
-                    </a:p>
-                  </a:txBody>
-                  <a:tcPr marL="64008" marR="45720" marT="13716" marB="13716" anchor="ctr">
-                    <a:solidFill>
-                      <a:srgbClr val="FFFFFF"/>
-                    </a:solidFill>
-                  </a:tcPr>
-                </a:tc>
-              </a:tr>
-              <a:tr h="329184">
-                <a:tc>
-                  <a:txBody>
-                    <a:bodyPr/>
-                    <a:lstStyle/>
-                    <a:p>
-                      <a:r>
-                        <a:rPr sz="1250" b="0">
-                          <a:solidFill>
-                            <a:srgbClr val="22272E"/>
-                          </a:solidFill>
-                          <a:latin typeface="STHeiti"/>
-                        </a:rPr>
-                        <a:t>Judger 单用</a:t>
-                      </a:r>
-                    </a:p>
-                  </a:txBody>
-                  <a:tcPr marL="64008" marR="45720" marT="13716" marB="13716" anchor="ctr">
-                    <a:solidFill>
-                      <a:srgbClr val="F3F5F8"/>
-                    </a:solidFill>
-                  </a:tcPr>
-                </a:tc>
-                <a:tc>
-                  <a:txBody>
-                    <a:bodyPr/>
-                    <a:lstStyle/>
-                    <a:p>
-                      <a:r>
-                        <a:rPr sz="1250" b="0">
-                          <a:solidFill>
-                            <a:srgbClr val="22272E"/>
-                          </a:solidFill>
-                          <a:latin typeface="STHeiti"/>
-                        </a:rPr>
-                        <a:t>10.48%</a:t>
-                      </a:r>
-                    </a:p>
-                  </a:txBody>
-                  <a:tcPr marL="64008" marR="45720" marT="13716" marB="13716" anchor="ctr">
-                    <a:solidFill>
-                      <a:srgbClr val="F3F5F8"/>
-                    </a:solidFill>
-                  </a:tcPr>
-                </a:tc>
-              </a:tr>
-              <a:tr h="329184">
-                <a:tc>
-                  <a:txBody>
-                    <a:bodyPr/>
-                    <a:lstStyle/>
-                    <a:p>
-                      <a:r>
-                        <a:rPr sz="1250" b="1">
-                          <a:solidFill>
-                            <a:srgbClr val="22272E"/>
-                          </a:solidFill>
-                          <a:latin typeface="STHeiti"/>
-                        </a:rPr>
-                        <a:t>SSH + 任一检测器</a:t>
-                      </a:r>
-                    </a:p>
-                  </a:txBody>
-                  <a:tcPr marL="64008" marR="45720" marT="13716" marB="13716" anchor="ctr">
-                    <a:solidFill>
-                      <a:srgbClr val="FFFFFF"/>
-                    </a:solidFill>
-                  </a:tcPr>
-                </a:tc>
-                <a:tc>
-                  <a:txBody>
-                    <a:bodyPr/>
-                    <a:lstStyle/>
-                    <a:p>
-                      <a:r>
-                        <a:rPr sz="1250" b="1">
-                          <a:solidFill>
-                            <a:srgbClr val="22272E"/>
-                          </a:solidFill>
-                          <a:latin typeface="STHeiti"/>
-                        </a:rPr>
-                        <a:t>0%</a:t>
-                      </a:r>
-                    </a:p>
-                  </a:txBody>
-                  <a:tcPr marL="64008" marR="45720" marT="13716" marB="13716" anchor="ctr">
-                    <a:solidFill>
-                      <a:srgbClr val="FFFFFF"/>
-                    </a:solidFill>
-                  </a:tcPr>
-                </a:tc>
-              </a:tr>
-            </a:tbl>
-          </a:graphicData>
-        </a:graphic>
-      </p:graphicFrame>
-      <p:sp>
-        <p:nvSpPr>
-          <p:cNvPr id="7" name="Rounded Rectangle 6"/>
+      <p:pic>
+        <p:nvPicPr>
+          <p:cNvPr id="6" name="Picture 5" descr="f2-ssh-risk.png"/>
+          <p:cNvPicPr>
+            <a:picLocks noChangeAspect="1"/>
+          </p:cNvPicPr>
+          <p:nvPr/>
+        </p:nvPicPr>
+        <p:blipFill>
+          <a:blip r:embed="rId2"/>
+          <a:stretch>
+            <a:fillRect/>
+          </a:stretch>
+        </p:blipFill>
+        <p:spPr>
+          <a:xfrm>
+            <a:off x="566928" y="1463040"/>
+            <a:ext cx="6413546" cy="3100822"/>
+          </a:xfrm>
+          <a:prstGeom prst="rect">
+            <a:avLst/>
+          </a:prstGeom>
+        </p:spPr>
+      </p:pic>
+      <p:sp>
+        <p:nvSpPr>
+          <p:cNvPr id="7" name="TextBox 6"/>
+          <p:cNvSpPr txBox="1"/>
+          <p:nvPr/>
+        </p:nvSpPr>
+        <p:spPr>
+          <a:xfrm>
+            <a:off x="566928" y="4637014"/>
+            <a:ext cx="6413546" cy="256032"/>
+          </a:xfrm>
+          <a:prstGeom prst="rect">
+            <a:avLst/>
+          </a:prstGeom>
+          <a:noFill/>
+        </p:spPr>
+        <p:txBody>
+          <a:bodyPr wrap="square" lIns="0" rIns="0" tIns="0" bIns="0">
+            <a:spAutoFit/>
+          </a:bodyPr>
+          <a:lstStyle/>
+          <a:p>
+            <a:pPr algn="ctr"/>
+            <a:r>
+              <a:rPr sz="1000" b="0">
+                <a:solidFill>
+                  <a:srgbClr val="5B6470"/>
+                </a:solidFill>
+                <a:latin typeface="STHeiti"/>
+              </a:rPr>
+              <a:t>论文 Figure 3：各基准上的平均风险分与告警率</a:t>
+            </a:r>
+          </a:p>
+        </p:txBody>
+      </p:sp>
+      <p:sp>
+        <p:nvSpPr>
+          <p:cNvPr id="8" name="Rounded Rectangle 7"/>
           <p:cNvSpPr/>
           <p:nvPr/>
         </p:nvSpPr>
         <p:spPr>
           <a:xfrm>
-            <a:off x="566928" y="2999232"/>
-            <a:ext cx="3551834" cy="932688"/>
+            <a:off x="7309658" y="1463040"/>
+            <a:ext cx="4315109" cy="713232"/>
           </a:xfrm>
           <a:prstGeom prst="roundRect">
             <a:avLst>
@@ -15606,29 +14257,28 @@
       </p:sp>
       <p:sp>
         <p:nvSpPr>
-          <p:cNvPr id="8" name="TextBox 7"/>
-          <p:cNvSpPr txBox="1"/>
-          <p:nvPr/>
-        </p:nvSpPr>
-        <p:spPr>
-          <a:xfrm>
-            <a:off x="640080" y="3081528"/>
-            <a:ext cx="3405530" cy="768096"/>
-          </a:xfrm>
-          <a:prstGeom prst="rect">
-            <a:avLst/>
-          </a:prstGeom>
-          <a:noFill/>
-        </p:spPr>
-        <p:txBody>
-          <a:bodyPr wrap="square" lIns="0" rIns="0" tIns="0" bIns="0">
-            <a:spAutoFit/>
-          </a:bodyPr>
-          <a:lstStyle/>
-          <a:p>
-            <a:pPr algn="ctr"/>
-            <a:r>
-              <a:rPr sz="1700" b="1">
+          <p:cNvPr id="9" name="TextBox 8"/>
+          <p:cNvSpPr txBox="1"/>
+          <p:nvPr/>
+        </p:nvSpPr>
+        <p:spPr>
+          <a:xfrm>
+            <a:off x="7455962" y="1554480"/>
+            <a:ext cx="4022501" cy="530352"/>
+          </a:xfrm>
+          <a:prstGeom prst="rect">
+            <a:avLst/>
+          </a:prstGeom>
+          <a:noFill/>
+        </p:spPr>
+        <p:txBody>
+          <a:bodyPr wrap="square" lIns="0" rIns="0" tIns="0" bIns="0">
+            <a:spAutoFit/>
+          </a:bodyPr>
+          <a:lstStyle/>
+          <a:p>
+            <a:r>
+              <a:rPr sz="1500" b="1">
                 <a:solidFill>
                   <a:srgbClr val="0E8F82"/>
                 </a:solidFill>
@@ -15638,7 +14288,6 @@
             </a:r>
           </a:p>
           <a:p>
-            <a:pPr algn="ctr"/>
             <a:r>
               <a:rPr sz="1050" b="0">
                 <a:solidFill>
@@ -15653,14 +14302,14 @@
       </p:sp>
       <p:sp>
         <p:nvSpPr>
-          <p:cNvPr id="9" name="Rounded Rectangle 8"/>
+          <p:cNvPr id="10" name="Rounded Rectangle 9"/>
           <p:cNvSpPr/>
           <p:nvPr/>
         </p:nvSpPr>
         <p:spPr>
           <a:xfrm>
-            <a:off x="4319930" y="2999232"/>
-            <a:ext cx="3551834" cy="932688"/>
+            <a:off x="7309658" y="2322576"/>
+            <a:ext cx="4315109" cy="713232"/>
           </a:xfrm>
           <a:prstGeom prst="roundRect">
             <a:avLst>
@@ -15701,29 +14350,28 @@
       </p:sp>
       <p:sp>
         <p:nvSpPr>
-          <p:cNvPr id="10" name="TextBox 9"/>
-          <p:cNvSpPr txBox="1"/>
-          <p:nvPr/>
-        </p:nvSpPr>
-        <p:spPr>
-          <a:xfrm>
-            <a:off x="4393082" y="3081528"/>
-            <a:ext cx="3405530" cy="768096"/>
-          </a:xfrm>
-          <a:prstGeom prst="rect">
-            <a:avLst/>
-          </a:prstGeom>
-          <a:noFill/>
-        </p:spPr>
-        <p:txBody>
-          <a:bodyPr wrap="square" lIns="0" rIns="0" tIns="0" bIns="0">
-            <a:spAutoFit/>
-          </a:bodyPr>
-          <a:lstStyle/>
-          <a:p>
-            <a:pPr algn="ctr"/>
-            <a:r>
-              <a:rPr sz="1700" b="1">
+          <p:cNvPr id="11" name="TextBox 10"/>
+          <p:cNvSpPr txBox="1"/>
+          <p:nvPr/>
+        </p:nvSpPr>
+        <p:spPr>
+          <a:xfrm>
+            <a:off x="7455962" y="2414016"/>
+            <a:ext cx="4022501" cy="530352"/>
+          </a:xfrm>
+          <a:prstGeom prst="rect">
+            <a:avLst/>
+          </a:prstGeom>
+          <a:noFill/>
+        </p:spPr>
+        <p:txBody>
+          <a:bodyPr wrap="square" lIns="0" rIns="0" tIns="0" bIns="0">
+            <a:spAutoFit/>
+          </a:bodyPr>
+          <a:lstStyle/>
+          <a:p>
+            <a:r>
+              <a:rPr sz="1500" b="1">
                 <a:solidFill>
                   <a:srgbClr val="1F6FB2"/>
                 </a:solidFill>
@@ -15733,7 +14381,6 @@
             </a:r>
           </a:p>
           <a:p>
-            <a:pPr algn="ctr"/>
             <a:r>
               <a:rPr sz="1050" b="0">
                 <a:solidFill>
@@ -15748,14 +14395,14 @@
       </p:sp>
       <p:sp>
         <p:nvSpPr>
-          <p:cNvPr id="11" name="Rounded Rectangle 10"/>
+          <p:cNvPr id="12" name="Rounded Rectangle 11"/>
           <p:cNvSpPr/>
           <p:nvPr/>
         </p:nvSpPr>
         <p:spPr>
           <a:xfrm>
-            <a:off x="8072932" y="2999232"/>
-            <a:ext cx="3551834" cy="932688"/>
+            <a:off x="7309658" y="3182112"/>
+            <a:ext cx="4315109" cy="713232"/>
           </a:xfrm>
           <a:prstGeom prst="roundRect">
             <a:avLst>
@@ -15796,29 +14443,28 @@
       </p:sp>
       <p:sp>
         <p:nvSpPr>
-          <p:cNvPr id="12" name="TextBox 11"/>
-          <p:cNvSpPr txBox="1"/>
-          <p:nvPr/>
-        </p:nvSpPr>
-        <p:spPr>
-          <a:xfrm>
-            <a:off x="8146084" y="3081528"/>
-            <a:ext cx="3405530" cy="768096"/>
-          </a:xfrm>
-          <a:prstGeom prst="rect">
-            <a:avLst/>
-          </a:prstGeom>
-          <a:noFill/>
-        </p:spPr>
-        <p:txBody>
-          <a:bodyPr wrap="square" lIns="0" rIns="0" tIns="0" bIns="0">
-            <a:spAutoFit/>
-          </a:bodyPr>
-          <a:lstStyle/>
-          <a:p>
-            <a:pPr algn="ctr"/>
-            <a:r>
-              <a:rPr sz="1700" b="1">
+          <p:cNvPr id="13" name="TextBox 12"/>
+          <p:cNvSpPr txBox="1"/>
+          <p:nvPr/>
+        </p:nvSpPr>
+        <p:spPr>
+          <a:xfrm>
+            <a:off x="7455962" y="3273552"/>
+            <a:ext cx="4022501" cy="530352"/>
+          </a:xfrm>
+          <a:prstGeom prst="rect">
+            <a:avLst/>
+          </a:prstGeom>
+          <a:noFill/>
+        </p:spPr>
+        <p:txBody>
+          <a:bodyPr wrap="square" lIns="0" rIns="0" tIns="0" bIns="0">
+            <a:spAutoFit/>
+          </a:bodyPr>
+          <a:lstStyle/>
+          <a:p>
+            <a:r>
+              <a:rPr sz="1500" b="1">
                 <a:solidFill>
                   <a:srgbClr val="C86A00"/>
                 </a:solidFill>
@@ -15828,7 +14474,6 @@
             </a:r>
           </a:p>
           <a:p>
-            <a:pPr algn="ctr"/>
             <a:r>
               <a:rPr sz="1050" b="0">
                 <a:solidFill>
@@ -15843,14 +14488,14 @@
       </p:sp>
       <p:sp>
         <p:nvSpPr>
-          <p:cNvPr id="13" name="TextBox 12"/>
-          <p:cNvSpPr txBox="1"/>
-          <p:nvPr/>
-        </p:nvSpPr>
-        <p:spPr>
-          <a:xfrm>
-            <a:off x="566928" y="4114800"/>
-            <a:ext cx="11057839" cy="645414"/>
+          <p:cNvPr id="14" name="TextBox 13"/>
+          <p:cNvSpPr txBox="1"/>
+          <p:nvPr/>
+        </p:nvSpPr>
+        <p:spPr>
+          <a:xfrm>
+            <a:off x="7309658" y="4059936"/>
+            <a:ext cx="4315109" cy="1223264"/>
           </a:xfrm>
           <a:prstGeom prst="rect">
             <a:avLst/>
@@ -15869,7 +14514,7 @@
               </a:spcAft>
             </a:pPr>
             <a:r>
-              <a:rPr sz="1250" b="0">
+              <a:rPr sz="1200" b="0">
                 <a:solidFill>
                   <a:srgbClr val="0E8F82"/>
                 </a:solidFill>
@@ -15878,7 +14523,7 @@
               <a:t>· </a:t>
             </a:r>
             <a:r>
-              <a:rPr sz="1250" b="1">
+              <a:rPr sz="1200" b="1">
                 <a:solidFill>
                   <a:srgbClr val="22272E"/>
                 </a:solidFill>
@@ -15894,7 +14539,7 @@
               </a:spcAft>
             </a:pPr>
             <a:r>
-              <a:rPr sz="1250" b="0">
+              <a:rPr sz="1200" b="0">
                 <a:solidFill>
                   <a:srgbClr val="0E8F82"/>
                 </a:solidFill>
@@ -15903,7 +14548,7 @@
               <a:t>· </a:t>
             </a:r>
             <a:r>
-              <a:rPr sz="1250" b="0">
+              <a:rPr sz="1200" b="0">
                 <a:solidFill>
                   <a:srgbClr val="22272E"/>
                 </a:solidFill>
@@ -17236,180 +15881,75 @@
           </a:p>
         </p:txBody>
       </p:sp>
-      <p:graphicFrame>
-        <p:nvGraphicFramePr>
-          <p:cNvPr id="6" name="Table 5"/>
-          <p:cNvGraphicFramePr>
-            <a:graphicFrameLocks noGrp="1"/>
-          </p:cNvGraphicFramePr>
-          <p:nvPr/>
-        </p:nvGraphicFramePr>
-        <p:xfrm>
-          <a:off x="566928" y="1463040"/>
-          <a:ext cx="11057838" cy="987552"/>
-        </p:xfrm>
-        <a:graphic>
-          <a:graphicData uri="http://schemas.openxmlformats.org/drawingml/2006/table">
-            <a:tbl>
-              <a:tblPr firstRow="1">
-                <a:tableStyleId>{5C22544A-7EE6-4342-B048-85BDC9FD1C3A}</a:tableStyleId>
-              </a:tblPr>
-              <a:tblGrid>
-                <a:gridCol w="5528919"/>
-                <a:gridCol w="5528919"/>
-              </a:tblGrid>
-              <a:tr h="329184">
-                <a:tc>
-                  <a:txBody>
-                    <a:bodyPr/>
-                    <a:lstStyle/>
-                    <a:p>
-                      <a:r>
-                        <a:rPr sz="1200" b="1">
-                          <a:solidFill>
-                            <a:srgbClr val="FFFFFF"/>
-                          </a:solidFill>
-                          <a:latin typeface="STHeiti"/>
-                        </a:rPr>
-                        <a:t>对比对象</a:t>
-                      </a:r>
-                    </a:p>
-                  </a:txBody>
-                  <a:tcPr marL="64008" marR="45720" marT="13716" marB="13716" anchor="ctr">
-                    <a:solidFill>
-                      <a:srgbClr val="0F2A4A"/>
-                    </a:solidFill>
-                  </a:tcPr>
-                </a:tc>
-                <a:tc>
-                  <a:txBody>
-                    <a:bodyPr/>
-                    <a:lstStyle/>
-                    <a:p>
-                      <a:r>
-                        <a:rPr sz="1200" b="1">
-                          <a:solidFill>
-                            <a:srgbClr val="FFFFFF"/>
-                          </a:solidFill>
-                          <a:latin typeface="STHeiti"/>
-                        </a:rPr>
-                        <a:t>结果</a:t>
-                      </a:r>
-                    </a:p>
-                  </a:txBody>
-                  <a:tcPr marL="64008" marR="45720" marT="13716" marB="13716" anchor="ctr">
-                    <a:solidFill>
-                      <a:srgbClr val="0F2A4A"/>
-                    </a:solidFill>
-                  </a:tcPr>
-                </a:tc>
-              </a:tr>
-              <a:tr h="329184">
-                <a:tc>
-                  <a:txBody>
-                    <a:bodyPr/>
-                    <a:lstStyle/>
-                    <a:p>
-                      <a:r>
-                        <a:rPr sz="1250" b="0">
-                          <a:solidFill>
-                            <a:srgbClr val="22272E"/>
-                          </a:solidFill>
-                          <a:latin typeface="STHeiti"/>
-                        </a:rPr>
-                        <a:t>vs SOTA 动态防御</a:t>
-                      </a:r>
-                    </a:p>
-                  </a:txBody>
-                  <a:tcPr marL="64008" marR="45720" marT="13716" marB="13716" anchor="ctr">
-                    <a:solidFill>
-                      <a:srgbClr val="FFFFFF"/>
-                    </a:solidFill>
-                  </a:tcPr>
-                </a:tc>
-                <a:tc>
-                  <a:txBody>
-                    <a:bodyPr/>
-                    <a:lstStyle/>
-                    <a:p>
-                      <a:r>
-                        <a:rPr sz="1250" b="1">
-                          <a:solidFill>
-                            <a:srgbClr val="22272E"/>
-                          </a:solidFill>
-                          <a:latin typeface="STHeiti"/>
-                        </a:rPr>
-                        <a:t>ASR 再降 22% 以上</a:t>
-                      </a:r>
-                    </a:p>
-                  </a:txBody>
-                  <a:tcPr marL="64008" marR="45720" marT="13716" marB="13716" anchor="ctr">
-                    <a:solidFill>
-                      <a:srgbClr val="FFFFFF"/>
-                    </a:solidFill>
-                  </a:tcPr>
-                </a:tc>
-              </a:tr>
-              <a:tr h="329184">
-                <a:tc>
-                  <a:txBody>
-                    <a:bodyPr/>
-                    <a:lstStyle/>
-                    <a:p>
-                      <a:r>
-                        <a:rPr sz="1250" b="0">
-                          <a:solidFill>
-                            <a:srgbClr val="22272E"/>
-                          </a:solidFill>
-                          <a:latin typeface="STHeiti"/>
-                        </a:rPr>
-                        <a:t>攻击下的可用性</a:t>
-                      </a:r>
-                    </a:p>
-                  </a:txBody>
-                  <a:tcPr marL="64008" marR="45720" marT="13716" marB="13716" anchor="ctr">
-                    <a:solidFill>
-                      <a:srgbClr val="F3F5F8"/>
-                    </a:solidFill>
-                  </a:tcPr>
-                </a:tc>
-                <a:tc>
-                  <a:txBody>
-                    <a:bodyPr/>
-                    <a:lstStyle/>
-                    <a:p>
-                      <a:r>
-                        <a:rPr sz="1250" b="1">
-                          <a:solidFill>
-                            <a:srgbClr val="22272E"/>
-                          </a:solidFill>
-                          <a:latin typeface="STHeiti"/>
-                        </a:rPr>
-                        <a:t>翻倍**（对比静态基线）</a:t>
-                      </a:r>
-                    </a:p>
-                  </a:txBody>
-                  <a:tcPr marL="64008" marR="45720" marT="13716" marB="13716" anchor="ctr">
-                    <a:solidFill>
-                      <a:srgbClr val="F3F5F8"/>
-                    </a:solidFill>
-                  </a:tcPr>
-                </a:tc>
-              </a:tr>
-            </a:tbl>
-          </a:graphicData>
-        </a:graphic>
-      </p:graphicFrame>
-      <p:sp>
-        <p:nvSpPr>
-          <p:cNvPr id="7" name="Rounded Rectangle 6"/>
+      <p:pic>
+        <p:nvPicPr>
+          <p:cNvPr id="6" name="Picture 5" descr="t7-vigil-siren.png"/>
+          <p:cNvPicPr>
+            <a:picLocks noChangeAspect="1"/>
+          </p:cNvPicPr>
+          <p:nvPr/>
+        </p:nvPicPr>
+        <p:blipFill>
+          <a:blip r:embed="rId2"/>
+          <a:stretch>
+            <a:fillRect/>
+          </a:stretch>
+        </p:blipFill>
+        <p:spPr>
+          <a:xfrm>
+            <a:off x="2126529" y="1463040"/>
+            <a:ext cx="7938636" cy="3127248"/>
+          </a:xfrm>
+          <a:prstGeom prst="rect">
+            <a:avLst/>
+          </a:prstGeom>
+        </p:spPr>
+      </p:pic>
+      <p:sp>
+        <p:nvSpPr>
+          <p:cNvPr id="7" name="TextBox 6"/>
+          <p:cNvSpPr txBox="1"/>
+          <p:nvPr/>
+        </p:nvSpPr>
+        <p:spPr>
+          <a:xfrm>
+            <a:off x="566928" y="4663440"/>
+            <a:ext cx="11057839" cy="256032"/>
+          </a:xfrm>
+          <a:prstGeom prst="rect">
+            <a:avLst/>
+          </a:prstGeom>
+          <a:noFill/>
+        </p:spPr>
+        <p:txBody>
+          <a:bodyPr wrap="square" lIns="0" rIns="0" tIns="0" bIns="0">
+            <a:spAutoFit/>
+          </a:bodyPr>
+          <a:lstStyle/>
+          <a:p>
+            <a:pPr algn="ctr"/>
+            <a:r>
+              <a:rPr sz="1000" b="0">
+                <a:solidFill>
+                  <a:srgbClr val="5B6470"/>
+                </a:solidFill>
+                <a:latin typeface="STHeiti"/>
+              </a:rPr>
+              <a:t>论文 Table 2：VIGIL 与各基线在 SIREN 上的性能</a:t>
+            </a:r>
+          </a:p>
+        </p:txBody>
+      </p:sp>
+      <p:sp>
+        <p:nvSpPr>
+          <p:cNvPr id="8" name="Rounded Rectangle 7"/>
           <p:cNvSpPr/>
           <p:nvPr/>
         </p:nvSpPr>
         <p:spPr>
           <a:xfrm>
-            <a:off x="566928" y="2670048"/>
-            <a:ext cx="3551834" cy="932688"/>
+            <a:off x="566928" y="5120640"/>
+            <a:ext cx="3551834" cy="841248"/>
           </a:xfrm>
           <a:prstGeom prst="roundRect">
             <a:avLst>
@@ -17450,14 +15990,14 @@
       </p:sp>
       <p:sp>
         <p:nvSpPr>
-          <p:cNvPr id="8" name="TextBox 7"/>
-          <p:cNvSpPr txBox="1"/>
-          <p:nvPr/>
-        </p:nvSpPr>
-        <p:spPr>
-          <a:xfrm>
-            <a:off x="640080" y="2752344"/>
-            <a:ext cx="3405530" cy="768096"/>
+          <p:cNvPr id="9" name="TextBox 8"/>
+          <p:cNvSpPr txBox="1"/>
+          <p:nvPr/>
+        </p:nvSpPr>
+        <p:spPr>
+          <a:xfrm>
+            <a:off x="640080" y="5202936"/>
+            <a:ext cx="3405530" cy="676656"/>
           </a:xfrm>
           <a:prstGeom prst="rect">
             <a:avLst/>
@@ -17472,7 +16012,7 @@
           <a:p>
             <a:pPr algn="ctr"/>
             <a:r>
-              <a:rPr sz="1700" b="1">
+              <a:rPr sz="1500" b="1">
                 <a:solidFill>
                   <a:srgbClr val="1F6FB2"/>
                 </a:solidFill>
@@ -17497,14 +16037,14 @@
       </p:sp>
       <p:sp>
         <p:nvSpPr>
-          <p:cNvPr id="9" name="Rounded Rectangle 8"/>
+          <p:cNvPr id="10" name="Rounded Rectangle 9"/>
           <p:cNvSpPr/>
           <p:nvPr/>
         </p:nvSpPr>
         <p:spPr>
           <a:xfrm>
-            <a:off x="4319930" y="2670048"/>
-            <a:ext cx="3551834" cy="932688"/>
+            <a:off x="4319930" y="5120640"/>
+            <a:ext cx="3551834" cy="841248"/>
           </a:xfrm>
           <a:prstGeom prst="roundRect">
             <a:avLst>
@@ -17545,14 +16085,14 @@
       </p:sp>
       <p:sp>
         <p:nvSpPr>
-          <p:cNvPr id="10" name="TextBox 9"/>
-          <p:cNvSpPr txBox="1"/>
-          <p:nvPr/>
-        </p:nvSpPr>
-        <p:spPr>
-          <a:xfrm>
-            <a:off x="4393082" y="2752344"/>
-            <a:ext cx="3405530" cy="768096"/>
+          <p:cNvPr id="11" name="TextBox 10"/>
+          <p:cNvSpPr txBox="1"/>
+          <p:nvPr/>
+        </p:nvSpPr>
+        <p:spPr>
+          <a:xfrm>
+            <a:off x="4393082" y="5202936"/>
+            <a:ext cx="3405530" cy="676656"/>
           </a:xfrm>
           <a:prstGeom prst="rect">
             <a:avLst/>
@@ -17567,7 +16107,7 @@
           <a:p>
             <a:pPr algn="ctr"/>
             <a:r>
-              <a:rPr sz="1700" b="1">
+              <a:rPr sz="1500" b="1">
                 <a:solidFill>
                   <a:srgbClr val="B3261E"/>
                 </a:solidFill>
@@ -17592,14 +16132,14 @@
       </p:sp>
       <p:sp>
         <p:nvSpPr>
-          <p:cNvPr id="11" name="Rounded Rectangle 10"/>
+          <p:cNvPr id="12" name="Rounded Rectangle 11"/>
           <p:cNvSpPr/>
           <p:nvPr/>
         </p:nvSpPr>
         <p:spPr>
           <a:xfrm>
-            <a:off x="8072932" y="2670048"/>
-            <a:ext cx="3551834" cy="932688"/>
+            <a:off x="8072932" y="5120640"/>
+            <a:ext cx="3551834" cy="841248"/>
           </a:xfrm>
           <a:prstGeom prst="roundRect">
             <a:avLst>
@@ -17640,14 +16180,14 @@
       </p:sp>
       <p:sp>
         <p:nvSpPr>
-          <p:cNvPr id="12" name="TextBox 11"/>
-          <p:cNvSpPr txBox="1"/>
-          <p:nvPr/>
-        </p:nvSpPr>
-        <p:spPr>
-          <a:xfrm>
-            <a:off x="8146084" y="2752344"/>
-            <a:ext cx="3405530" cy="768096"/>
+          <p:cNvPr id="13" name="TextBox 12"/>
+          <p:cNvSpPr txBox="1"/>
+          <p:nvPr/>
+        </p:nvSpPr>
+        <p:spPr>
+          <a:xfrm>
+            <a:off x="8146084" y="5202936"/>
+            <a:ext cx="3405530" cy="676656"/>
           </a:xfrm>
           <a:prstGeom prst="rect">
             <a:avLst/>
@@ -17662,7 +16202,7 @@
           <a:p>
             <a:pPr algn="ctr"/>
             <a:r>
-              <a:rPr sz="1700" b="1">
+              <a:rPr sz="1500" b="1">
                 <a:solidFill>
                   <a:srgbClr val="0E8F82"/>
                 </a:solidFill>
@@ -17687,14 +16227,14 @@
       </p:sp>
       <p:sp>
         <p:nvSpPr>
-          <p:cNvPr id="13" name="TextBox 12"/>
-          <p:cNvSpPr txBox="1"/>
-          <p:nvPr/>
-        </p:nvSpPr>
-        <p:spPr>
-          <a:xfrm>
-            <a:off x="566928" y="3785616"/>
-            <a:ext cx="11057839" cy="350139"/>
+          <p:cNvPr id="14" name="TextBox 13"/>
+          <p:cNvSpPr txBox="1"/>
+          <p:nvPr/>
+        </p:nvSpPr>
+        <p:spPr>
+          <a:xfrm>
+            <a:off x="566928" y="6108192"/>
+            <a:ext cx="11057839" cy="329184"/>
           </a:xfrm>
           <a:prstGeom prst="rect">
             <a:avLst/>
@@ -17709,11 +16249,11 @@
           <a:p>
             <a:pPr>
               <a:spcAft>
-                <a:spcPts val="700"/>
+                <a:spcPts val="600"/>
               </a:spcAft>
             </a:pPr>
             <a:r>
-              <a:rPr sz="1250" b="0">
+              <a:rPr sz="1200" b="0">
                 <a:solidFill>
                   <a:srgbClr val="0E8F82"/>
                 </a:solidFill>
@@ -17722,7 +16262,7 @@
               <a:t>· </a:t>
             </a:r>
             <a:r>
-              <a:rPr sz="1250" b="1">
+              <a:rPr sz="1200" b="1">
                 <a:solidFill>
                   <a:srgbClr val="22272E"/>
                 </a:solidFill>
@@ -21663,180 +20203,75 @@
           </a:p>
         </p:txBody>
       </p:sp>
-      <p:graphicFrame>
-        <p:nvGraphicFramePr>
-          <p:cNvPr id="6" name="Table 5"/>
-          <p:cNvGraphicFramePr>
-            <a:graphicFrameLocks noGrp="1"/>
-          </p:cNvGraphicFramePr>
-          <p:nvPr/>
-        </p:nvGraphicFramePr>
-        <p:xfrm>
-          <a:off x="566928" y="1463040"/>
-          <a:ext cx="11057838" cy="987552"/>
-        </p:xfrm>
-        <a:graphic>
-          <a:graphicData uri="http://schemas.openxmlformats.org/drawingml/2006/table">
-            <a:tbl>
-              <a:tblPr firstRow="1">
-                <a:tableStyleId>{5C22544A-7EE6-4342-B048-85BDC9FD1C3A}</a:tableStyleId>
-              </a:tblPr>
-              <a:tblGrid>
-                <a:gridCol w="7565889"/>
-                <a:gridCol w="3491949"/>
-              </a:tblGrid>
-              <a:tr h="329184">
-                <a:tc>
-                  <a:txBody>
-                    <a:bodyPr/>
-                    <a:lstStyle/>
-                    <a:p>
-                      <a:r>
-                        <a:rPr sz="1200" b="1">
-                          <a:solidFill>
-                            <a:srgbClr val="FFFFFF"/>
-                          </a:solidFill>
-                          <a:latin typeface="STHeiti"/>
-                        </a:rPr>
-                        <a:t>对比对象</a:t>
-                      </a:r>
-                    </a:p>
-                  </a:txBody>
-                  <a:tcPr marL="64008" marR="45720" marT="13716" marB="13716" anchor="ctr">
-                    <a:solidFill>
-                      <a:srgbClr val="0F2A4A"/>
-                    </a:solidFill>
-                  </a:tcPr>
-                </a:tc>
-                <a:tc>
-                  <a:txBody>
-                    <a:bodyPr/>
-                    <a:lstStyle/>
-                    <a:p>
-                      <a:r>
-                        <a:rPr sz="1200" b="1">
-                          <a:solidFill>
-                            <a:srgbClr val="FFFFFF"/>
-                          </a:solidFill>
-                          <a:latin typeface="STHeiti"/>
-                        </a:rPr>
-                        <a:t>提升</a:t>
-                      </a:r>
-                    </a:p>
-                  </a:txBody>
-                  <a:tcPr marL="64008" marR="45720" marT="13716" marB="13716" anchor="ctr">
-                    <a:solidFill>
-                      <a:srgbClr val="0F2A4A"/>
-                    </a:solidFill>
-                  </a:tcPr>
-                </a:tc>
-              </a:tr>
-              <a:tr h="329184">
-                <a:tc>
-                  <a:txBody>
-                    <a:bodyPr/>
-                    <a:lstStyle/>
-                    <a:p>
-                      <a:r>
-                        <a:rPr sz="1250" b="0">
-                          <a:solidFill>
-                            <a:srgbClr val="22272E"/>
-                          </a:solidFill>
-                          <a:latin typeface="STHeiti"/>
-                        </a:rPr>
-                        <a:t>vs GPT-4 上其他 SOTA 越狱</a:t>
-                      </a:r>
-                    </a:p>
-                  </a:txBody>
-                  <a:tcPr marL="64008" marR="45720" marT="13716" marB="13716" anchor="ctr">
-                    <a:solidFill>
-                      <a:srgbClr val="FFFFFF"/>
-                    </a:solidFill>
-                  </a:tcPr>
-                </a:tc>
-                <a:tc>
-                  <a:txBody>
-                    <a:bodyPr/>
-                    <a:lstStyle/>
-                    <a:p>
-                      <a:r>
-                        <a:rPr sz="1250" b="1">
-                          <a:solidFill>
-                            <a:srgbClr val="22272E"/>
-                          </a:solidFill>
-                          <a:latin typeface="STHeiti"/>
-                        </a:rPr>
-                        <a:t>+29% ~ +61%</a:t>
-                      </a:r>
-                    </a:p>
-                  </a:txBody>
-                  <a:tcPr marL="64008" marR="45720" marT="13716" marB="13716" anchor="ctr">
-                    <a:solidFill>
-                      <a:srgbClr val="FFFFFF"/>
-                    </a:solidFill>
-                  </a:tcPr>
-                </a:tc>
-              </a:tr>
-              <a:tr h="329184">
-                <a:tc>
-                  <a:txBody>
-                    <a:bodyPr/>
-                    <a:lstStyle/>
-                    <a:p>
-                      <a:r>
-                        <a:rPr sz="1250" b="0">
-                          <a:solidFill>
-                            <a:srgbClr val="22272E"/>
-                          </a:solidFill>
-                          <a:latin typeface="STHeiti"/>
-                        </a:rPr>
-                        <a:t>vs Gemini-Pro 上其他 SOTA 越狱</a:t>
-                      </a:r>
-                    </a:p>
-                  </a:txBody>
-                  <a:tcPr marL="64008" marR="45720" marT="13716" marB="13716" anchor="ctr">
-                    <a:solidFill>
-                      <a:srgbClr val="F3F5F8"/>
-                    </a:solidFill>
-                  </a:tcPr>
-                </a:tc>
-                <a:tc>
-                  <a:txBody>
-                    <a:bodyPr/>
-                    <a:lstStyle/>
-                    <a:p>
-                      <a:r>
-                        <a:rPr sz="1250" b="1">
-                          <a:solidFill>
-                            <a:srgbClr val="22272E"/>
-                          </a:solidFill>
-                          <a:latin typeface="STHeiti"/>
-                        </a:rPr>
-                        <a:t>+49% ~ +71%</a:t>
-                      </a:r>
-                    </a:p>
-                  </a:txBody>
-                  <a:tcPr marL="64008" marR="45720" marT="13716" marB="13716" anchor="ctr">
-                    <a:solidFill>
-                      <a:srgbClr val="F3F5F8"/>
-                    </a:solidFill>
-                  </a:tcPr>
-                </a:tc>
-              </a:tr>
-            </a:tbl>
-          </a:graphicData>
-        </a:graphic>
-      </p:graphicFrame>
-      <p:sp>
-        <p:nvSpPr>
-          <p:cNvPr id="7" name="Rounded Rectangle 6"/>
+      <p:pic>
+        <p:nvPicPr>
+          <p:cNvPr id="6" name="Picture 5" descr="t4-crescendo.png"/>
+          <p:cNvPicPr>
+            <a:picLocks noChangeAspect="1"/>
+          </p:cNvPicPr>
+          <p:nvPr/>
+        </p:nvPicPr>
+        <p:blipFill>
+          <a:blip r:embed="rId2"/>
+          <a:stretch>
+            <a:fillRect/>
+          </a:stretch>
+        </p:blipFill>
+        <p:spPr>
+          <a:xfrm>
+            <a:off x="566929" y="1463040"/>
+            <a:ext cx="11057837" cy="1914913"/>
+          </a:xfrm>
+          <a:prstGeom prst="rect">
+            <a:avLst/>
+          </a:prstGeom>
+        </p:spPr>
+      </p:pic>
+      <p:sp>
+        <p:nvSpPr>
+          <p:cNvPr id="7" name="TextBox 6"/>
+          <p:cNvSpPr txBox="1"/>
+          <p:nvPr/>
+        </p:nvSpPr>
+        <p:spPr>
+          <a:xfrm>
+            <a:off x="566928" y="3451105"/>
+            <a:ext cx="11057839" cy="256032"/>
+          </a:xfrm>
+          <a:prstGeom prst="rect">
+            <a:avLst/>
+          </a:prstGeom>
+          <a:noFill/>
+        </p:spPr>
+        <p:txBody>
+          <a:bodyPr wrap="square" lIns="0" rIns="0" tIns="0" bIns="0">
+            <a:spAutoFit/>
+          </a:bodyPr>
+          <a:lstStyle/>
+          <a:p>
+            <a:pPr algn="ctr"/>
+            <a:r>
+              <a:rPr sz="1000" b="0">
+                <a:solidFill>
+                  <a:srgbClr val="5B6470"/>
+                </a:solidFill>
+                <a:latin typeface="STHeiti"/>
+              </a:rPr>
+              <a:t>论文 Table 4：各越狱方法在 AdvBench 子集上的对比</a:t>
+            </a:r>
+          </a:p>
+        </p:txBody>
+      </p:sp>
+      <p:sp>
+        <p:nvSpPr>
+          <p:cNvPr id="8" name="Rounded Rectangle 7"/>
           <p:cNvSpPr/>
           <p:nvPr/>
         </p:nvSpPr>
         <p:spPr>
           <a:xfrm>
-            <a:off x="566928" y="2670048"/>
-            <a:ext cx="3551834" cy="932688"/>
+            <a:off x="566928" y="3908305"/>
+            <a:ext cx="3551834" cy="841248"/>
           </a:xfrm>
           <a:prstGeom prst="roundRect">
             <a:avLst>
@@ -21877,14 +20312,14 @@
       </p:sp>
       <p:sp>
         <p:nvSpPr>
-          <p:cNvPr id="8" name="TextBox 7"/>
-          <p:cNvSpPr txBox="1"/>
-          <p:nvPr/>
-        </p:nvSpPr>
-        <p:spPr>
-          <a:xfrm>
-            <a:off x="640080" y="2752344"/>
-            <a:ext cx="3405530" cy="768096"/>
+          <p:cNvPr id="9" name="TextBox 8"/>
+          <p:cNvSpPr txBox="1"/>
+          <p:nvPr/>
+        </p:nvSpPr>
+        <p:spPr>
+          <a:xfrm>
+            <a:off x="640080" y="3990601"/>
+            <a:ext cx="3405530" cy="676656"/>
           </a:xfrm>
           <a:prstGeom prst="rect">
             <a:avLst/>
@@ -21899,7 +20334,7 @@
           <a:p>
             <a:pPr algn="ctr"/>
             <a:r>
-              <a:rPr sz="1700" b="1">
+              <a:rPr sz="1500" b="1">
                 <a:solidFill>
                   <a:srgbClr val="1F6FB2"/>
                 </a:solidFill>
@@ -21924,14 +20359,14 @@
       </p:sp>
       <p:sp>
         <p:nvSpPr>
-          <p:cNvPr id="9" name="Rounded Rectangle 8"/>
+          <p:cNvPr id="10" name="Rounded Rectangle 9"/>
           <p:cNvSpPr/>
           <p:nvPr/>
         </p:nvSpPr>
         <p:spPr>
           <a:xfrm>
-            <a:off x="4319930" y="2670048"/>
-            <a:ext cx="3551834" cy="932688"/>
+            <a:off x="4319930" y="3908305"/>
+            <a:ext cx="3551834" cy="841248"/>
           </a:xfrm>
           <a:prstGeom prst="roundRect">
             <a:avLst>
@@ -21972,14 +20407,14 @@
       </p:sp>
       <p:sp>
         <p:nvSpPr>
-          <p:cNvPr id="10" name="TextBox 9"/>
-          <p:cNvSpPr txBox="1"/>
-          <p:nvPr/>
-        </p:nvSpPr>
-        <p:spPr>
-          <a:xfrm>
-            <a:off x="4393082" y="2752344"/>
-            <a:ext cx="3405530" cy="768096"/>
+          <p:cNvPr id="11" name="TextBox 10"/>
+          <p:cNvSpPr txBox="1"/>
+          <p:nvPr/>
+        </p:nvSpPr>
+        <p:spPr>
+          <a:xfrm>
+            <a:off x="4393082" y="3990601"/>
+            <a:ext cx="3405530" cy="676656"/>
           </a:xfrm>
           <a:prstGeom prst="rect">
             <a:avLst/>
@@ -21994,7 +20429,7 @@
           <a:p>
             <a:pPr algn="ctr"/>
             <a:r>
-              <a:rPr sz="1700" b="1">
+              <a:rPr sz="1500" b="1">
                 <a:solidFill>
                   <a:srgbClr val="B3261E"/>
                 </a:solidFill>
@@ -22019,14 +20454,14 @@
       </p:sp>
       <p:sp>
         <p:nvSpPr>
-          <p:cNvPr id="11" name="Rounded Rectangle 10"/>
+          <p:cNvPr id="12" name="Rounded Rectangle 11"/>
           <p:cNvSpPr/>
           <p:nvPr/>
         </p:nvSpPr>
         <p:spPr>
           <a:xfrm>
-            <a:off x="8072932" y="2670048"/>
-            <a:ext cx="3551834" cy="932688"/>
+            <a:off x="8072932" y="3908305"/>
+            <a:ext cx="3551834" cy="841248"/>
           </a:xfrm>
           <a:prstGeom prst="roundRect">
             <a:avLst>
@@ -22067,14 +20502,14 @@
       </p:sp>
       <p:sp>
         <p:nvSpPr>
-          <p:cNvPr id="12" name="TextBox 11"/>
-          <p:cNvSpPr txBox="1"/>
-          <p:nvPr/>
-        </p:nvSpPr>
-        <p:spPr>
-          <a:xfrm>
-            <a:off x="8146084" y="2752344"/>
-            <a:ext cx="3405530" cy="768096"/>
+          <p:cNvPr id="13" name="TextBox 12"/>
+          <p:cNvSpPr txBox="1"/>
+          <p:nvPr/>
+        </p:nvSpPr>
+        <p:spPr>
+          <a:xfrm>
+            <a:off x="8146084" y="3990601"/>
+            <a:ext cx="3405530" cy="676656"/>
           </a:xfrm>
           <a:prstGeom prst="rect">
             <a:avLst/>
@@ -22089,7 +20524,7 @@
           <a:p>
             <a:pPr algn="ctr"/>
             <a:r>
-              <a:rPr sz="1700" b="1">
+              <a:rPr sz="1500" b="1">
                 <a:solidFill>
                   <a:srgbClr val="C86A00"/>
                 </a:solidFill>
@@ -22114,14 +20549,14 @@
       </p:sp>
       <p:sp>
         <p:nvSpPr>
-          <p:cNvPr id="13" name="TextBox 12"/>
-          <p:cNvSpPr txBox="1"/>
-          <p:nvPr/>
-        </p:nvSpPr>
-        <p:spPr>
-          <a:xfrm>
-            <a:off x="566928" y="3785616"/>
-            <a:ext cx="11057839" cy="645414"/>
+          <p:cNvPr id="14" name="TextBox 13"/>
+          <p:cNvSpPr txBox="1"/>
+          <p:nvPr/>
+        </p:nvSpPr>
+        <p:spPr>
+          <a:xfrm>
+            <a:off x="566928" y="4895857"/>
+            <a:ext cx="11057839" cy="603503"/>
           </a:xfrm>
           <a:prstGeom prst="rect">
             <a:avLst/>
@@ -22136,11 +20571,11 @@
           <a:p>
             <a:pPr>
               <a:spcAft>
-                <a:spcPts val="700"/>
+                <a:spcPts val="600"/>
               </a:spcAft>
             </a:pPr>
             <a:r>
-              <a:rPr sz="1250" b="0">
+              <a:rPr sz="1200" b="0">
                 <a:solidFill>
                   <a:srgbClr val="0E8F82"/>
                 </a:solidFill>
@@ -22149,7 +20584,7 @@
               <a:t>· </a:t>
             </a:r>
             <a:r>
-              <a:rPr sz="1250" b="0">
+              <a:rPr sz="1200" b="0">
                 <a:solidFill>
                   <a:srgbClr val="22272E"/>
                 </a:solidFill>
@@ -22161,11 +20596,11 @@
           <a:p>
             <a:pPr>
               <a:spcAft>
-                <a:spcPts val="700"/>
+                <a:spcPts val="600"/>
               </a:spcAft>
             </a:pPr>
             <a:r>
-              <a:rPr sz="1250" b="0">
+              <a:rPr sz="1200" b="0">
                 <a:solidFill>
                   <a:srgbClr val="0E8F82"/>
                 </a:solidFill>
@@ -22174,7 +20609,7 @@
               <a:t>· </a:t>
             </a:r>
             <a:r>
-              <a:rPr sz="1250" b="1">
+              <a:rPr sz="1200" b="1">
                 <a:solidFill>
                   <a:srgbClr val="22272E"/>
                 </a:solidFill>

--- a/阶段2-卫星多智能体防御/presentations/卫星多智能体安全调研汇报.pptx
+++ b/阶段2-卫星多智能体防御/presentations/卫星多智能体安全调研汇报.pptx
@@ -4996,40 +4996,6 @@
           </a:p>
         </p:txBody>
       </p:sp>
-      <p:sp>
-        <p:nvSpPr>
-          <p:cNvPr id="9" name="TextBox 8"/>
-          <p:cNvSpPr txBox="1"/>
-          <p:nvPr/>
-        </p:nvSpPr>
-        <p:spPr>
-          <a:xfrm>
-            <a:off x="566928" y="5577840"/>
-            <a:ext cx="11057839" cy="365760"/>
-          </a:xfrm>
-          <a:prstGeom prst="rect">
-            <a:avLst/>
-          </a:prstGeom>
-          <a:noFill/>
-        </p:spPr>
-        <p:txBody>
-          <a:bodyPr wrap="square" lIns="0" rIns="0" tIns="0" bIns="0">
-            <a:spAutoFit/>
-          </a:bodyPr>
-          <a:lstStyle/>
-          <a:p>
-            <a:r>
-              <a:rPr sz="1200" b="0">
-                <a:solidFill>
-                  <a:srgbClr val="5B6470"/>
-                </a:solidFill>
-                <a:latin typeface="STHeiti"/>
-              </a:rPr>
-              <a:t>本篇四页：动机与难点 → 模型 → 实验结果</a:t>
-            </a:r>
-          </a:p>
-        </p:txBody>
-      </p:sp>
     </p:spTree>
   </p:cSld>
   <p:clrMapOvr>
@@ -5422,7 +5388,7 @@
                 </a:solidFill>
                 <a:latin typeface="STHeiti"/>
               </a:rPr>
-              <a:t>防守方每轮按「全新交互」评，必须区分跨轮记忆和跨轮会话。</a:t>
+              <a:t>防守方每轮按「全新交互」评，因此要区分跨轮记忆与跨轮会话两件事。</a:t>
             </a:r>
           </a:p>
           <a:p>
@@ -6685,40 +6651,6 @@
           </a:p>
         </p:txBody>
       </p:sp>
-      <p:sp>
-        <p:nvSpPr>
-          <p:cNvPr id="9" name="TextBox 8"/>
-          <p:cNvSpPr txBox="1"/>
-          <p:nvPr/>
-        </p:nvSpPr>
-        <p:spPr>
-          <a:xfrm>
-            <a:off x="566928" y="5577840"/>
-            <a:ext cx="11057839" cy="365760"/>
-          </a:xfrm>
-          <a:prstGeom prst="rect">
-            <a:avLst/>
-          </a:prstGeom>
-          <a:noFill/>
-        </p:spPr>
-        <p:txBody>
-          <a:bodyPr wrap="square" lIns="0" rIns="0" tIns="0" bIns="0">
-            <a:spAutoFit/>
-          </a:bodyPr>
-          <a:lstStyle/>
-          <a:p>
-            <a:r>
-              <a:rPr sz="1200" b="0">
-                <a:solidFill>
-                  <a:srgbClr val="5B6470"/>
-                </a:solidFill>
-                <a:latin typeface="STHeiti"/>
-              </a:rPr>
-              <a:t>本篇四页：动机与难点 → 模型 → 实验结果</a:t>
-            </a:r>
-          </a:p>
-        </p:txBody>
-      </p:sp>
     </p:spTree>
   </p:cSld>
   <p:clrMapOvr>
@@ -7661,7 +7593,7 @@
                 </a:solidFill>
                 <a:latin typeface="STHeiti"/>
               </a:rPr>
-              <a:t>导师给的三步——前两步都很轻，谁都不会报警</a:t>
+              <a:t>三个环节：拿参数 → 改认知 → 动手</a:t>
             </a:r>
           </a:p>
         </p:txBody>
@@ -8274,7 +8206,7 @@
                 </a:solidFill>
                 <a:latin typeface="STHeiti"/>
               </a:rPr>
-              <a:t>这三条特殊性，在下面每一篇的防御设计里都会成为判断依据。</a:t>
+              <a:t>数据流与工具输出是主要入口；动作不可逆意味着防御窗口必须前移。</a:t>
             </a:r>
           </a:p>
         </p:txBody>
@@ -9137,40 +9069,6 @@
           </a:p>
         </p:txBody>
       </p:sp>
-      <p:sp>
-        <p:nvSpPr>
-          <p:cNvPr id="9" name="TextBox 8"/>
-          <p:cNvSpPr txBox="1"/>
-          <p:nvPr/>
-        </p:nvSpPr>
-        <p:spPr>
-          <a:xfrm>
-            <a:off x="566928" y="5577840"/>
-            <a:ext cx="11057839" cy="365760"/>
-          </a:xfrm>
-          <a:prstGeom prst="rect">
-            <a:avLst/>
-          </a:prstGeom>
-          <a:noFill/>
-        </p:spPr>
-        <p:txBody>
-          <a:bodyPr wrap="square" lIns="0" rIns="0" tIns="0" bIns="0">
-            <a:spAutoFit/>
-          </a:bodyPr>
-          <a:lstStyle/>
-          <a:p>
-            <a:r>
-              <a:rPr sz="1200" b="0">
-                <a:solidFill>
-                  <a:srgbClr val="5B6470"/>
-                </a:solidFill>
-                <a:latin typeface="STHeiti"/>
-              </a:rPr>
-              <a:t>本篇四页：动机与难点 → 模型 → 实验结果</a:t>
-            </a:r>
-          </a:p>
-        </p:txBody>
-      </p:sp>
     </p:spTree>
   </p:cSld>
   <p:clrMapOvr>
@@ -10353,7 +10251,7 @@
                 </a:solidFill>
                 <a:latin typeface="STHeiti"/>
               </a:rPr>
-              <a:t>arXiv v2 报 77%，正式版报 67%——引用要注明版本</a:t>
+              <a:t>arXiv v2 报 77%，IEEE SaTML 2026 正式版报 67%</a:t>
             </a:r>
           </a:p>
         </p:txBody>
@@ -10801,40 +10699,6 @@
           </a:p>
         </p:txBody>
       </p:sp>
-      <p:sp>
-        <p:nvSpPr>
-          <p:cNvPr id="9" name="TextBox 8"/>
-          <p:cNvSpPr txBox="1"/>
-          <p:nvPr/>
-        </p:nvSpPr>
-        <p:spPr>
-          <a:xfrm>
-            <a:off x="566928" y="5577840"/>
-            <a:ext cx="11057839" cy="365760"/>
-          </a:xfrm>
-          <a:prstGeom prst="rect">
-            <a:avLst/>
-          </a:prstGeom>
-          <a:noFill/>
-        </p:spPr>
-        <p:txBody>
-          <a:bodyPr wrap="square" lIns="0" rIns="0" tIns="0" bIns="0">
-            <a:spAutoFit/>
-          </a:bodyPr>
-          <a:lstStyle/>
-          <a:p>
-            <a:r>
-              <a:rPr sz="1200" b="0">
-                <a:solidFill>
-                  <a:srgbClr val="5B6470"/>
-                </a:solidFill>
-                <a:latin typeface="STHeiti"/>
-              </a:rPr>
-              <a:t>本篇四页：动机与难点 → 模型 → 实验结果</a:t>
-            </a:r>
-          </a:p>
-        </p:txBody>
-      </p:sp>
     </p:spTree>
   </p:cSld>
   <p:clrMapOvr>
@@ -12509,40 +12373,6 @@
           </a:p>
         </p:txBody>
       </p:sp>
-      <p:sp>
-        <p:nvSpPr>
-          <p:cNvPr id="9" name="TextBox 8"/>
-          <p:cNvSpPr txBox="1"/>
-          <p:nvPr/>
-        </p:nvSpPr>
-        <p:spPr>
-          <a:xfrm>
-            <a:off x="566928" y="5577840"/>
-            <a:ext cx="11057839" cy="365760"/>
-          </a:xfrm>
-          <a:prstGeom prst="rect">
-            <a:avLst/>
-          </a:prstGeom>
-          <a:noFill/>
-        </p:spPr>
-        <p:txBody>
-          <a:bodyPr wrap="square" lIns="0" rIns="0" tIns="0" bIns="0">
-            <a:spAutoFit/>
-          </a:bodyPr>
-          <a:lstStyle/>
-          <a:p>
-            <a:r>
-              <a:rPr sz="1200" b="0">
-                <a:solidFill>
-                  <a:srgbClr val="5B6470"/>
-                </a:solidFill>
-                <a:latin typeface="STHeiti"/>
-              </a:rPr>
-              <a:t>本篇四页：动机与难点 → 模型 → 实验结果</a:t>
-            </a:r>
-          </a:p>
-        </p:txBody>
-      </p:sp>
     </p:spTree>
   </p:cSld>
   <p:clrMapOvr>
@@ -14855,40 +14685,6 @@
                 <a:latin typeface="STHeiti"/>
               </a:rPr>
               <a:t>「先验证再提交」——不信任数据流，也不信任工具流。</a:t>
-            </a:r>
-          </a:p>
-        </p:txBody>
-      </p:sp>
-      <p:sp>
-        <p:nvSpPr>
-          <p:cNvPr id="9" name="TextBox 8"/>
-          <p:cNvSpPr txBox="1"/>
-          <p:nvPr/>
-        </p:nvSpPr>
-        <p:spPr>
-          <a:xfrm>
-            <a:off x="566928" y="5577840"/>
-            <a:ext cx="11057839" cy="365760"/>
-          </a:xfrm>
-          <a:prstGeom prst="rect">
-            <a:avLst/>
-          </a:prstGeom>
-          <a:noFill/>
-        </p:spPr>
-        <p:txBody>
-          <a:bodyPr wrap="square" lIns="0" rIns="0" tIns="0" bIns="0">
-            <a:spAutoFit/>
-          </a:bodyPr>
-          <a:lstStyle/>
-          <a:p>
-            <a:r>
-              <a:rPr sz="1200" b="0">
-                <a:solidFill>
-                  <a:srgbClr val="5B6470"/>
-                </a:solidFill>
-                <a:latin typeface="STHeiti"/>
-              </a:rPr>
-              <a:t>本篇四页：动机与难点 → 模型 → 实验结果</a:t>
             </a:r>
           </a:p>
         </p:txBody>
@@ -17379,7 +17175,7 @@
                 </a:solidFill>
                 <a:latin typeface="STHeiti"/>
               </a:rPr>
-              <a:t>接下来读什么、以及需要老师定的三件事</a:t>
+              <a:t>接下来读什么、以及需要确认的三件事</a:t>
             </a:r>
           </a:p>
         </p:txBody>
@@ -17853,7 +17649,7 @@
                 </a:solidFill>
                 <a:latin typeface="STHeiti"/>
               </a:rPr>
-              <a:t>请老师指正</a:t>
+              <a:t>欢迎提问与讨论</a:t>
             </a:r>
           </a:p>
         </p:txBody>
@@ -19231,40 +19027,6 @@
           </a:p>
         </p:txBody>
       </p:sp>
-      <p:sp>
-        <p:nvSpPr>
-          <p:cNvPr id="9" name="TextBox 8"/>
-          <p:cNvSpPr txBox="1"/>
-          <p:nvPr/>
-        </p:nvSpPr>
-        <p:spPr>
-          <a:xfrm>
-            <a:off x="566928" y="5577840"/>
-            <a:ext cx="11057839" cy="365760"/>
-          </a:xfrm>
-          <a:prstGeom prst="rect">
-            <a:avLst/>
-          </a:prstGeom>
-          <a:noFill/>
-        </p:spPr>
-        <p:txBody>
-          <a:bodyPr wrap="square" lIns="0" rIns="0" tIns="0" bIns="0">
-            <a:spAutoFit/>
-          </a:bodyPr>
-          <a:lstStyle/>
-          <a:p>
-            <a:r>
-              <a:rPr sz="1200" b="0">
-                <a:solidFill>
-                  <a:srgbClr val="5B6470"/>
-                </a:solidFill>
-                <a:latin typeface="STHeiti"/>
-              </a:rPr>
-              <a:t>本篇四页：动机与难点 → 模型 → 实验结果</a:t>
-            </a:r>
-          </a:p>
-        </p:txBody>
-      </p:sp>
     </p:spTree>
   </p:cSld>
   <p:clrMapOvr>
@@ -20916,40 +20678,6 @@
                 <a:latin typeface="STHeiti"/>
               </a:rPr>
               <a:t>把注入从单模型推进到多智能体：14 个攻击向量 + 四层架构防御。</a:t>
-            </a:r>
-          </a:p>
-        </p:txBody>
-      </p:sp>
-      <p:sp>
-        <p:nvSpPr>
-          <p:cNvPr id="9" name="TextBox 8"/>
-          <p:cNvSpPr txBox="1"/>
-          <p:nvPr/>
-        </p:nvSpPr>
-        <p:spPr>
-          <a:xfrm>
-            <a:off x="566928" y="5577840"/>
-            <a:ext cx="11057839" cy="365760"/>
-          </a:xfrm>
-          <a:prstGeom prst="rect">
-            <a:avLst/>
-          </a:prstGeom>
-          <a:noFill/>
-        </p:spPr>
-        <p:txBody>
-          <a:bodyPr wrap="square" lIns="0" rIns="0" tIns="0" bIns="0">
-            <a:spAutoFit/>
-          </a:bodyPr>
-          <a:lstStyle/>
-          <a:p>
-            <a:r>
-              <a:rPr sz="1200" b="0">
-                <a:solidFill>
-                  <a:srgbClr val="5B6470"/>
-                </a:solidFill>
-                <a:latin typeface="STHeiti"/>
-              </a:rPr>
-              <a:t>本篇四页：动机与难点 → 模型 → 实验结果</a:t>
             </a:r>
           </a:p>
         </p:txBody>
